--- a/presentation/demo-day-incident-deck.pptx
+++ b/presentation/demo-day-incident-deck.pptx
@@ -3298,9 +3298,54 @@
           </a:p>
         </p:txBody>
       </p:sp>
+      <p:sp>
+        <p:nvSpPr>
+          <p:cNvPr id="7" name="Rounded Rectangle 6"/>
+          <p:cNvSpPr/>
+          <p:nvPr/>
+        </p:nvSpPr>
+        <p:spPr>
+          <a:xfrm>
+            <a:off x="7406640" y="2011680"/>
+            <a:ext cx="3840480" cy="2601468"/>
+          </a:xfrm>
+          <a:prstGeom prst="roundRect">
+            <a:avLst/>
+          </a:prstGeom>
+          <a:solidFill>
+            <a:srgbClr val="08090B"/>
+          </a:solidFill>
+          <a:ln w="12700">
+            <a:solidFill>
+              <a:srgbClr val="252832"/>
+            </a:solidFill>
+          </a:ln>
+        </p:spPr>
+        <p:style>
+          <a:lnRef idx="1">
+            <a:schemeClr val="accent1"/>
+          </a:lnRef>
+          <a:fillRef idx="3">
+            <a:schemeClr val="accent1"/>
+          </a:fillRef>
+          <a:effectRef idx="2">
+            <a:schemeClr val="accent1"/>
+          </a:effectRef>
+          <a:fontRef idx="minor">
+            <a:schemeClr val="lt1"/>
+          </a:fontRef>
+        </p:style>
+        <p:txBody>
+          <a:bodyPr rtlCol="0" anchor="ctr"/>
+          <a:lstStyle/>
+          <a:p>
+            <a:pPr algn="ctr"/>
+          </a:p>
+        </p:txBody>
+      </p:sp>
       <p:pic>
         <p:nvPicPr>
-          <p:cNvPr id="7" name="Picture 6" descr="deck-home.png"/>
+          <p:cNvPr id="8" name="Picture 7" descr="deck-home.png"/>
           <p:cNvPicPr>
             <a:picLocks noChangeAspect="1"/>
           </p:cNvPicPr>
@@ -3314,8 +3359,8 @@
         </p:blipFill>
         <p:spPr>
           <a:xfrm>
-            <a:off x="7589520" y="914400"/>
-            <a:ext cx="3657600" cy="5029200"/>
+            <a:off x="7415784" y="2212848"/>
+            <a:ext cx="3822192" cy="2391156"/>
           </a:xfrm>
           <a:prstGeom prst="rect">
             <a:avLst/>
@@ -3324,7 +3369,136 @@
       </p:pic>
       <p:sp>
         <p:nvSpPr>
-          <p:cNvPr id="8" name="TextBox 7"/>
+          <p:cNvPr id="9" name="Oval 8"/>
+          <p:cNvSpPr/>
+          <p:nvPr/>
+        </p:nvSpPr>
+        <p:spPr>
+          <a:xfrm>
+            <a:off x="7516368" y="2084832"/>
+            <a:ext cx="54864" cy="54864"/>
+          </a:xfrm>
+          <a:prstGeom prst="ellipse">
+            <a:avLst/>
+          </a:prstGeom>
+          <a:solidFill>
+            <a:srgbClr val="FF5F56"/>
+          </a:solidFill>
+          <a:ln>
+            <a:noFill/>
+          </a:ln>
+        </p:spPr>
+        <p:style>
+          <a:lnRef idx="1">
+            <a:schemeClr val="accent1"/>
+          </a:lnRef>
+          <a:fillRef idx="3">
+            <a:schemeClr val="accent1"/>
+          </a:fillRef>
+          <a:effectRef idx="2">
+            <a:schemeClr val="accent1"/>
+          </a:effectRef>
+          <a:fontRef idx="minor">
+            <a:schemeClr val="lt1"/>
+          </a:fontRef>
+        </p:style>
+        <p:txBody>
+          <a:bodyPr rtlCol="0" anchor="ctr"/>
+          <a:lstStyle/>
+          <a:p>
+            <a:pPr algn="ctr"/>
+          </a:p>
+        </p:txBody>
+      </p:sp>
+      <p:sp>
+        <p:nvSpPr>
+          <p:cNvPr id="10" name="Oval 9"/>
+          <p:cNvSpPr/>
+          <p:nvPr/>
+        </p:nvSpPr>
+        <p:spPr>
+          <a:xfrm>
+            <a:off x="7607808" y="2084832"/>
+            <a:ext cx="54864" cy="54864"/>
+          </a:xfrm>
+          <a:prstGeom prst="ellipse">
+            <a:avLst/>
+          </a:prstGeom>
+          <a:solidFill>
+            <a:srgbClr val="FFBD2E"/>
+          </a:solidFill>
+          <a:ln>
+            <a:noFill/>
+          </a:ln>
+        </p:spPr>
+        <p:style>
+          <a:lnRef idx="1">
+            <a:schemeClr val="accent1"/>
+          </a:lnRef>
+          <a:fillRef idx="3">
+            <a:schemeClr val="accent1"/>
+          </a:fillRef>
+          <a:effectRef idx="2">
+            <a:schemeClr val="accent1"/>
+          </a:effectRef>
+          <a:fontRef idx="minor">
+            <a:schemeClr val="lt1"/>
+          </a:fontRef>
+        </p:style>
+        <p:txBody>
+          <a:bodyPr rtlCol="0" anchor="ctr"/>
+          <a:lstStyle/>
+          <a:p>
+            <a:pPr algn="ctr"/>
+          </a:p>
+        </p:txBody>
+      </p:sp>
+      <p:sp>
+        <p:nvSpPr>
+          <p:cNvPr id="11" name="Oval 10"/>
+          <p:cNvSpPr/>
+          <p:nvPr/>
+        </p:nvSpPr>
+        <p:spPr>
+          <a:xfrm>
+            <a:off x="7699248" y="2084832"/>
+            <a:ext cx="54864" cy="54864"/>
+          </a:xfrm>
+          <a:prstGeom prst="ellipse">
+            <a:avLst/>
+          </a:prstGeom>
+          <a:solidFill>
+            <a:srgbClr val="27C93F"/>
+          </a:solidFill>
+          <a:ln>
+            <a:noFill/>
+          </a:ln>
+        </p:spPr>
+        <p:style>
+          <a:lnRef idx="1">
+            <a:schemeClr val="accent1"/>
+          </a:lnRef>
+          <a:fillRef idx="3">
+            <a:schemeClr val="accent1"/>
+          </a:fillRef>
+          <a:effectRef idx="2">
+            <a:schemeClr val="accent1"/>
+          </a:effectRef>
+          <a:fontRef idx="minor">
+            <a:schemeClr val="lt1"/>
+          </a:fontRef>
+        </p:style>
+        <p:txBody>
+          <a:bodyPr rtlCol="0" anchor="ctr"/>
+          <a:lstStyle/>
+          <a:p>
+            <a:pPr algn="ctr"/>
+          </a:p>
+        </p:txBody>
+      </p:sp>
+      <p:sp>
+        <p:nvSpPr>
+          <p:cNvPr id="12" name="TextBox 11"/>
           <p:cNvSpPr txBox="1"/>
           <p:nvPr/>
         </p:nvSpPr>
@@ -4188,9 +4362,54 @@
           </a:p>
         </p:txBody>
       </p:sp>
+      <p:sp>
+        <p:nvSpPr>
+          <p:cNvPr id="11" name="Rounded Rectangle 10"/>
+          <p:cNvSpPr/>
+          <p:nvPr/>
+        </p:nvSpPr>
+        <p:spPr>
+          <a:xfrm>
+            <a:off x="7406640" y="2011680"/>
+            <a:ext cx="3840480" cy="2601468"/>
+          </a:xfrm>
+          <a:prstGeom prst="roundRect">
+            <a:avLst/>
+          </a:prstGeom>
+          <a:solidFill>
+            <a:srgbClr val="08090B"/>
+          </a:solidFill>
+          <a:ln w="12700">
+            <a:solidFill>
+              <a:srgbClr val="252832"/>
+            </a:solidFill>
+          </a:ln>
+        </p:spPr>
+        <p:style>
+          <a:lnRef idx="1">
+            <a:schemeClr val="accent1"/>
+          </a:lnRef>
+          <a:fillRef idx="3">
+            <a:schemeClr val="accent1"/>
+          </a:fillRef>
+          <a:effectRef idx="2">
+            <a:schemeClr val="accent1"/>
+          </a:effectRef>
+          <a:fontRef idx="minor">
+            <a:schemeClr val="lt1"/>
+          </a:fontRef>
+        </p:style>
+        <p:txBody>
+          <a:bodyPr rtlCol="0" anchor="ctr"/>
+          <a:lstStyle/>
+          <a:p>
+            <a:pPr algn="ctr"/>
+          </a:p>
+        </p:txBody>
+      </p:sp>
       <p:pic>
         <p:nvPicPr>
-          <p:cNvPr id="11" name="Picture 10" descr="deck-main.png"/>
+          <p:cNvPr id="12" name="Picture 11" descr="deck-main.png"/>
           <p:cNvPicPr>
             <a:picLocks noChangeAspect="1"/>
           </p:cNvPicPr>
@@ -4204,14 +4423,143 @@
         </p:blipFill>
         <p:spPr>
           <a:xfrm>
-            <a:off x="7589520" y="1463040"/>
-            <a:ext cx="3657600" cy="4572000"/>
+            <a:off x="7415784" y="2212848"/>
+            <a:ext cx="3822192" cy="2391156"/>
           </a:xfrm>
           <a:prstGeom prst="rect">
             <a:avLst/>
           </a:prstGeom>
         </p:spPr>
       </p:pic>
+      <p:sp>
+        <p:nvSpPr>
+          <p:cNvPr id="13" name="Oval 12"/>
+          <p:cNvSpPr/>
+          <p:nvPr/>
+        </p:nvSpPr>
+        <p:spPr>
+          <a:xfrm>
+            <a:off x="7516368" y="2084832"/>
+            <a:ext cx="54864" cy="54864"/>
+          </a:xfrm>
+          <a:prstGeom prst="ellipse">
+            <a:avLst/>
+          </a:prstGeom>
+          <a:solidFill>
+            <a:srgbClr val="FF5F56"/>
+          </a:solidFill>
+          <a:ln>
+            <a:noFill/>
+          </a:ln>
+        </p:spPr>
+        <p:style>
+          <a:lnRef idx="1">
+            <a:schemeClr val="accent1"/>
+          </a:lnRef>
+          <a:fillRef idx="3">
+            <a:schemeClr val="accent1"/>
+          </a:fillRef>
+          <a:effectRef idx="2">
+            <a:schemeClr val="accent1"/>
+          </a:effectRef>
+          <a:fontRef idx="minor">
+            <a:schemeClr val="lt1"/>
+          </a:fontRef>
+        </p:style>
+        <p:txBody>
+          <a:bodyPr rtlCol="0" anchor="ctr"/>
+          <a:lstStyle/>
+          <a:p>
+            <a:pPr algn="ctr"/>
+          </a:p>
+        </p:txBody>
+      </p:sp>
+      <p:sp>
+        <p:nvSpPr>
+          <p:cNvPr id="14" name="Oval 13"/>
+          <p:cNvSpPr/>
+          <p:nvPr/>
+        </p:nvSpPr>
+        <p:spPr>
+          <a:xfrm>
+            <a:off x="7607808" y="2084832"/>
+            <a:ext cx="54864" cy="54864"/>
+          </a:xfrm>
+          <a:prstGeom prst="ellipse">
+            <a:avLst/>
+          </a:prstGeom>
+          <a:solidFill>
+            <a:srgbClr val="FFBD2E"/>
+          </a:solidFill>
+          <a:ln>
+            <a:noFill/>
+          </a:ln>
+        </p:spPr>
+        <p:style>
+          <a:lnRef idx="1">
+            <a:schemeClr val="accent1"/>
+          </a:lnRef>
+          <a:fillRef idx="3">
+            <a:schemeClr val="accent1"/>
+          </a:fillRef>
+          <a:effectRef idx="2">
+            <a:schemeClr val="accent1"/>
+          </a:effectRef>
+          <a:fontRef idx="minor">
+            <a:schemeClr val="lt1"/>
+          </a:fontRef>
+        </p:style>
+        <p:txBody>
+          <a:bodyPr rtlCol="0" anchor="ctr"/>
+          <a:lstStyle/>
+          <a:p>
+            <a:pPr algn="ctr"/>
+          </a:p>
+        </p:txBody>
+      </p:sp>
+      <p:sp>
+        <p:nvSpPr>
+          <p:cNvPr id="15" name="Oval 14"/>
+          <p:cNvSpPr/>
+          <p:nvPr/>
+        </p:nvSpPr>
+        <p:spPr>
+          <a:xfrm>
+            <a:off x="7699248" y="2084832"/>
+            <a:ext cx="54864" cy="54864"/>
+          </a:xfrm>
+          <a:prstGeom prst="ellipse">
+            <a:avLst/>
+          </a:prstGeom>
+          <a:solidFill>
+            <a:srgbClr val="27C93F"/>
+          </a:solidFill>
+          <a:ln>
+            <a:noFill/>
+          </a:ln>
+        </p:spPr>
+        <p:style>
+          <a:lnRef idx="1">
+            <a:schemeClr val="accent1"/>
+          </a:lnRef>
+          <a:fillRef idx="3">
+            <a:schemeClr val="accent1"/>
+          </a:fillRef>
+          <a:effectRef idx="2">
+            <a:schemeClr val="accent1"/>
+          </a:effectRef>
+          <a:fontRef idx="minor">
+            <a:schemeClr val="lt1"/>
+          </a:fontRef>
+        </p:style>
+        <p:txBody>
+          <a:bodyPr rtlCol="0" anchor="ctr"/>
+          <a:lstStyle/>
+          <a:p>
+            <a:pPr algn="ctr"/>
+          </a:p>
+        </p:txBody>
+      </p:sp>
     </p:spTree>
   </p:cSld>
   <p:clrMapOvr>
@@ -5507,9 +5855,54 @@
           </a:p>
         </p:txBody>
       </p:sp>
+      <p:sp>
+        <p:nvSpPr>
+          <p:cNvPr id="9" name="Rounded Rectangle 8"/>
+          <p:cNvSpPr/>
+          <p:nvPr/>
+        </p:nvSpPr>
+        <p:spPr>
+          <a:xfrm>
+            <a:off x="7406640" y="2011680"/>
+            <a:ext cx="3840480" cy="2601468"/>
+          </a:xfrm>
+          <a:prstGeom prst="roundRect">
+            <a:avLst/>
+          </a:prstGeom>
+          <a:solidFill>
+            <a:srgbClr val="08090B"/>
+          </a:solidFill>
+          <a:ln w="12700">
+            <a:solidFill>
+              <a:srgbClr val="252832"/>
+            </a:solidFill>
+          </a:ln>
+        </p:spPr>
+        <p:style>
+          <a:lnRef idx="1">
+            <a:schemeClr val="accent1"/>
+          </a:lnRef>
+          <a:fillRef idx="3">
+            <a:schemeClr val="accent1"/>
+          </a:fillRef>
+          <a:effectRef idx="2">
+            <a:schemeClr val="accent1"/>
+          </a:effectRef>
+          <a:fontRef idx="minor">
+            <a:schemeClr val="lt1"/>
+          </a:fontRef>
+        </p:style>
+        <p:txBody>
+          <a:bodyPr rtlCol="0" anchor="ctr"/>
+          <a:lstStyle/>
+          <a:p>
+            <a:pPr algn="ctr"/>
+          </a:p>
+        </p:txBody>
+      </p:sp>
       <p:pic>
         <p:nvPicPr>
-          <p:cNvPr id="9" name="Picture 8" descr="deck-character-chat.png"/>
+          <p:cNvPr id="10" name="Picture 9" descr="deck-character-chat.png"/>
           <p:cNvPicPr>
             <a:picLocks noChangeAspect="1"/>
           </p:cNvPicPr>
@@ -5523,14 +5916,143 @@
         </p:blipFill>
         <p:spPr>
           <a:xfrm>
-            <a:off x="7498079" y="1463040"/>
-            <a:ext cx="3749039" cy="4572000"/>
+            <a:off x="7415784" y="2212848"/>
+            <a:ext cx="3822192" cy="2391156"/>
           </a:xfrm>
           <a:prstGeom prst="rect">
             <a:avLst/>
           </a:prstGeom>
         </p:spPr>
       </p:pic>
+      <p:sp>
+        <p:nvSpPr>
+          <p:cNvPr id="11" name="Oval 10"/>
+          <p:cNvSpPr/>
+          <p:nvPr/>
+        </p:nvSpPr>
+        <p:spPr>
+          <a:xfrm>
+            <a:off x="7516368" y="2084832"/>
+            <a:ext cx="54864" cy="54864"/>
+          </a:xfrm>
+          <a:prstGeom prst="ellipse">
+            <a:avLst/>
+          </a:prstGeom>
+          <a:solidFill>
+            <a:srgbClr val="FF5F56"/>
+          </a:solidFill>
+          <a:ln>
+            <a:noFill/>
+          </a:ln>
+        </p:spPr>
+        <p:style>
+          <a:lnRef idx="1">
+            <a:schemeClr val="accent1"/>
+          </a:lnRef>
+          <a:fillRef idx="3">
+            <a:schemeClr val="accent1"/>
+          </a:fillRef>
+          <a:effectRef idx="2">
+            <a:schemeClr val="accent1"/>
+          </a:effectRef>
+          <a:fontRef idx="minor">
+            <a:schemeClr val="lt1"/>
+          </a:fontRef>
+        </p:style>
+        <p:txBody>
+          <a:bodyPr rtlCol="0" anchor="ctr"/>
+          <a:lstStyle/>
+          <a:p>
+            <a:pPr algn="ctr"/>
+          </a:p>
+        </p:txBody>
+      </p:sp>
+      <p:sp>
+        <p:nvSpPr>
+          <p:cNvPr id="12" name="Oval 11"/>
+          <p:cNvSpPr/>
+          <p:nvPr/>
+        </p:nvSpPr>
+        <p:spPr>
+          <a:xfrm>
+            <a:off x="7607808" y="2084832"/>
+            <a:ext cx="54864" cy="54864"/>
+          </a:xfrm>
+          <a:prstGeom prst="ellipse">
+            <a:avLst/>
+          </a:prstGeom>
+          <a:solidFill>
+            <a:srgbClr val="FFBD2E"/>
+          </a:solidFill>
+          <a:ln>
+            <a:noFill/>
+          </a:ln>
+        </p:spPr>
+        <p:style>
+          <a:lnRef idx="1">
+            <a:schemeClr val="accent1"/>
+          </a:lnRef>
+          <a:fillRef idx="3">
+            <a:schemeClr val="accent1"/>
+          </a:fillRef>
+          <a:effectRef idx="2">
+            <a:schemeClr val="accent1"/>
+          </a:effectRef>
+          <a:fontRef idx="minor">
+            <a:schemeClr val="lt1"/>
+          </a:fontRef>
+        </p:style>
+        <p:txBody>
+          <a:bodyPr rtlCol="0" anchor="ctr"/>
+          <a:lstStyle/>
+          <a:p>
+            <a:pPr algn="ctr"/>
+          </a:p>
+        </p:txBody>
+      </p:sp>
+      <p:sp>
+        <p:nvSpPr>
+          <p:cNvPr id="13" name="Oval 12"/>
+          <p:cNvSpPr/>
+          <p:nvPr/>
+        </p:nvSpPr>
+        <p:spPr>
+          <a:xfrm>
+            <a:off x="7699248" y="2084832"/>
+            <a:ext cx="54864" cy="54864"/>
+          </a:xfrm>
+          <a:prstGeom prst="ellipse">
+            <a:avLst/>
+          </a:prstGeom>
+          <a:solidFill>
+            <a:srgbClr val="27C93F"/>
+          </a:solidFill>
+          <a:ln>
+            <a:noFill/>
+          </a:ln>
+        </p:spPr>
+        <p:style>
+          <a:lnRef idx="1">
+            <a:schemeClr val="accent1"/>
+          </a:lnRef>
+          <a:fillRef idx="3">
+            <a:schemeClr val="accent1"/>
+          </a:fillRef>
+          <a:effectRef idx="2">
+            <a:schemeClr val="accent1"/>
+          </a:effectRef>
+          <a:fontRef idx="minor">
+            <a:schemeClr val="lt1"/>
+          </a:fontRef>
+        </p:style>
+        <p:txBody>
+          <a:bodyPr rtlCol="0" anchor="ctr"/>
+          <a:lstStyle/>
+          <a:p>
+            <a:pPr algn="ctr"/>
+          </a:p>
+        </p:txBody>
+      </p:sp>
     </p:spTree>
   </p:cSld>
   <p:clrMapOvr>

--- a/presentation/demo-day-incident-deck.pptx
+++ b/presentation/demo-day-incident-deck.pptx
@@ -5,14 +5,14 @@
     <p:sldMasterId id="2147483648" r:id="rId1"/>
   </p:sldMasterIdLst>
   <p:sldIdLst>
-    <p:sldId id="256" r:id="rId7"/>
-    <p:sldId id="257" r:id="rId8"/>
-    <p:sldId id="258" r:id="rId9"/>
-    <p:sldId id="259" r:id="rId10"/>
-    <p:sldId id="260" r:id="rId11"/>
-    <p:sldId id="261" r:id="rId12"/>
+    <p:sldId id="256" r:id="rId2"/>
+    <p:sldId id="257" r:id="rId3"/>
+    <p:sldId id="258" r:id="rId4"/>
+    <p:sldId id="259" r:id="rId5"/>
+    <p:sldId id="260" r:id="rId6"/>
+    <p:sldId id="261" r:id="rId7"/>
   </p:sldIdLst>
-  <p:sldSz cx="12191695" cy="6858000" type="screen4x3"/>
+  <p:sldSz cx="12192000" cy="6858000"/>
   <p:notesSz cx="6858000" cy="9144000"/>
   <p:defaultTextStyle>
     <a:defPPr>
@@ -109,6 +109,22 @@
       </a:defRPr>
     </a:lvl9pPr>
   </p:defaultTextStyle>
+  <p:extLst>
+    <p:ext uri="{EFAFB233-063F-42B5-8137-9DF3F51BA10A}">
+      <p15:sldGuideLst xmlns:p15="http://schemas.microsoft.com/office/powerpoint/2012/main">
+        <p15:guide id="1" orient="horz" pos="2160">
+          <p15:clr>
+            <a:srgbClr val="A4A3A4"/>
+          </p15:clr>
+        </p15:guide>
+        <p15:guide id="2" pos="2880">
+          <p15:clr>
+            <a:srgbClr val="A4A3A4"/>
+          </p15:clr>
+        </p15:guide>
+      </p15:sldGuideLst>
+    </p:ext>
+  </p:extLst>
 </p:presentation>
 </file>
 
@@ -150,10 +166,9 @@
           <a:lstStyle/>
           <a:p>
             <a:r>
-              <a:rPr lang="en-US" smtClean="0"/>
+              <a:rPr lang="en-US"/>
               <a:t>Click to edit Master title style</a:t>
             </a:r>
-            <a:endParaRPr lang="en-US"/>
           </a:p>
         </p:txBody>
       </p:sp>
@@ -269,10 +284,9 @@
           </a:lstStyle>
           <a:p>
             <a:r>
-              <a:rPr lang="en-US" smtClean="0"/>
+              <a:rPr lang="en-US"/>
               <a:t>Click to edit Master subtitle style</a:t>
             </a:r>
-            <a:endParaRPr lang="en-US"/>
           </a:p>
         </p:txBody>
       </p:sp>
@@ -293,7 +307,7 @@
           <a:p>
             <a:fld id="{5BCAD085-E8A6-8845-BD4E-CB4CCA059FC4}" type="datetimeFigureOut">
               <a:rPr lang="en-US" smtClean="0"/>
-              <a:t>1/27/13</a:t>
+              <a:t>6/10/26</a:t>
             </a:fld>
             <a:endParaRPr lang="en-US"/>
           </a:p>
@@ -387,10 +401,9 @@
           <a:lstStyle/>
           <a:p>
             <a:r>
-              <a:rPr lang="en-US" smtClean="0"/>
+              <a:rPr lang="en-US"/>
               <a:t>Click to edit Master title style</a:t>
             </a:r>
-            <a:endParaRPr lang="en-US"/>
           </a:p>
         </p:txBody>
       </p:sp>
@@ -411,38 +424,37 @@
           <a:p>
             <a:pPr lvl="0"/>
             <a:r>
-              <a:rPr lang="en-US" smtClean="0"/>
+              <a:rPr lang="en-US"/>
               <a:t>Click to edit Master text styles</a:t>
             </a:r>
           </a:p>
           <a:p>
             <a:pPr lvl="1"/>
             <a:r>
-              <a:rPr lang="en-US" smtClean="0"/>
+              <a:rPr lang="en-US"/>
               <a:t>Second level</a:t>
             </a:r>
           </a:p>
           <a:p>
             <a:pPr lvl="2"/>
             <a:r>
-              <a:rPr lang="en-US" smtClean="0"/>
+              <a:rPr lang="en-US"/>
               <a:t>Third level</a:t>
             </a:r>
           </a:p>
           <a:p>
             <a:pPr lvl="3"/>
             <a:r>
-              <a:rPr lang="en-US" smtClean="0"/>
+              <a:rPr lang="en-US"/>
               <a:t>Fourth level</a:t>
             </a:r>
           </a:p>
           <a:p>
             <a:pPr lvl="4"/>
             <a:r>
-              <a:rPr lang="en-US" smtClean="0"/>
+              <a:rPr lang="en-US"/>
               <a:t>Fifth level</a:t>
             </a:r>
-            <a:endParaRPr lang="en-US"/>
           </a:p>
         </p:txBody>
       </p:sp>
@@ -463,7 +475,7 @@
           <a:p>
             <a:fld id="{5BCAD085-E8A6-8845-BD4E-CB4CCA059FC4}" type="datetimeFigureOut">
               <a:rPr lang="en-US" smtClean="0"/>
-              <a:t>1/27/13</a:t>
+              <a:t>6/10/26</a:t>
             </a:fld>
             <a:endParaRPr lang="en-US"/>
           </a:p>
@@ -562,10 +574,9 @@
           <a:lstStyle/>
           <a:p>
             <a:r>
-              <a:rPr lang="en-US" smtClean="0"/>
+              <a:rPr lang="en-US"/>
               <a:t>Click to edit Master title style</a:t>
             </a:r>
-            <a:endParaRPr lang="en-US"/>
           </a:p>
         </p:txBody>
       </p:sp>
@@ -591,38 +602,37 @@
           <a:p>
             <a:pPr lvl="0"/>
             <a:r>
-              <a:rPr lang="en-US" smtClean="0"/>
+              <a:rPr lang="en-US"/>
               <a:t>Click to edit Master text styles</a:t>
             </a:r>
           </a:p>
           <a:p>
             <a:pPr lvl="1"/>
             <a:r>
-              <a:rPr lang="en-US" smtClean="0"/>
+              <a:rPr lang="en-US"/>
               <a:t>Second level</a:t>
             </a:r>
           </a:p>
           <a:p>
             <a:pPr lvl="2"/>
             <a:r>
-              <a:rPr lang="en-US" smtClean="0"/>
+              <a:rPr lang="en-US"/>
               <a:t>Third level</a:t>
             </a:r>
           </a:p>
           <a:p>
             <a:pPr lvl="3"/>
             <a:r>
-              <a:rPr lang="en-US" smtClean="0"/>
+              <a:rPr lang="en-US"/>
               <a:t>Fourth level</a:t>
             </a:r>
           </a:p>
           <a:p>
             <a:pPr lvl="4"/>
             <a:r>
-              <a:rPr lang="en-US" smtClean="0"/>
+              <a:rPr lang="en-US"/>
               <a:t>Fifth level</a:t>
             </a:r>
-            <a:endParaRPr lang="en-US"/>
           </a:p>
         </p:txBody>
       </p:sp>
@@ -643,7 +653,7 @@
           <a:p>
             <a:fld id="{5BCAD085-E8A6-8845-BD4E-CB4CCA059FC4}" type="datetimeFigureOut">
               <a:rPr lang="en-US" smtClean="0"/>
-              <a:t>1/27/13</a:t>
+              <a:t>6/10/26</a:t>
             </a:fld>
             <a:endParaRPr lang="en-US"/>
           </a:p>
@@ -737,10 +747,9 @@
           <a:lstStyle/>
           <a:p>
             <a:r>
-              <a:rPr lang="en-US" smtClean="0"/>
+              <a:rPr lang="en-US"/>
               <a:t>Click to edit Master title style</a:t>
             </a:r>
-            <a:endParaRPr lang="en-US"/>
           </a:p>
         </p:txBody>
       </p:sp>
@@ -761,38 +770,37 @@
           <a:p>
             <a:pPr lvl="0"/>
             <a:r>
-              <a:rPr lang="en-US" smtClean="0"/>
+              <a:rPr lang="en-US"/>
               <a:t>Click to edit Master text styles</a:t>
             </a:r>
           </a:p>
           <a:p>
             <a:pPr lvl="1"/>
             <a:r>
-              <a:rPr lang="en-US" smtClean="0"/>
+              <a:rPr lang="en-US"/>
               <a:t>Second level</a:t>
             </a:r>
           </a:p>
           <a:p>
             <a:pPr lvl="2"/>
             <a:r>
-              <a:rPr lang="en-US" smtClean="0"/>
+              <a:rPr lang="en-US"/>
               <a:t>Third level</a:t>
             </a:r>
           </a:p>
           <a:p>
             <a:pPr lvl="3"/>
             <a:r>
-              <a:rPr lang="en-US" smtClean="0"/>
+              <a:rPr lang="en-US"/>
               <a:t>Fourth level</a:t>
             </a:r>
           </a:p>
           <a:p>
             <a:pPr lvl="4"/>
             <a:r>
-              <a:rPr lang="en-US" smtClean="0"/>
+              <a:rPr lang="en-US"/>
               <a:t>Fifth level</a:t>
             </a:r>
-            <a:endParaRPr lang="en-US"/>
           </a:p>
         </p:txBody>
       </p:sp>
@@ -813,7 +821,7 @@
           <a:p>
             <a:fld id="{5BCAD085-E8A6-8845-BD4E-CB4CCA059FC4}" type="datetimeFigureOut">
               <a:rPr lang="en-US" smtClean="0"/>
-              <a:t>1/27/13</a:t>
+              <a:t>6/10/26</a:t>
             </a:fld>
             <a:endParaRPr lang="en-US"/>
           </a:p>
@@ -916,10 +924,9 @@
           </a:lstStyle>
           <a:p>
             <a:r>
-              <a:rPr lang="en-US" smtClean="0"/>
+              <a:rPr lang="en-US"/>
               <a:t>Click to edit Master title style</a:t>
             </a:r>
-            <a:endParaRPr lang="en-US"/>
           </a:p>
         </p:txBody>
       </p:sp>
@@ -1036,7 +1043,7 @@
           <a:p>
             <a:pPr lvl="0"/>
             <a:r>
-              <a:rPr lang="en-US" smtClean="0"/>
+              <a:rPr lang="en-US"/>
               <a:t>Click to edit Master text styles</a:t>
             </a:r>
           </a:p>
@@ -1059,7 +1066,7 @@
           <a:p>
             <a:fld id="{5BCAD085-E8A6-8845-BD4E-CB4CCA059FC4}" type="datetimeFigureOut">
               <a:rPr lang="en-US" smtClean="0"/>
-              <a:t>1/27/13</a:t>
+              <a:t>6/10/26</a:t>
             </a:fld>
             <a:endParaRPr lang="en-US"/>
           </a:p>
@@ -1153,10 +1160,9 @@
           <a:lstStyle/>
           <a:p>
             <a:r>
-              <a:rPr lang="en-US" smtClean="0"/>
+              <a:rPr lang="en-US"/>
               <a:t>Click to edit Master title style</a:t>
             </a:r>
-            <a:endParaRPr lang="en-US"/>
           </a:p>
         </p:txBody>
       </p:sp>
@@ -1210,38 +1216,37 @@
           <a:p>
             <a:pPr lvl="0"/>
             <a:r>
-              <a:rPr lang="en-US" smtClean="0"/>
+              <a:rPr lang="en-US"/>
               <a:t>Click to edit Master text styles</a:t>
             </a:r>
           </a:p>
           <a:p>
             <a:pPr lvl="1"/>
             <a:r>
-              <a:rPr lang="en-US" smtClean="0"/>
+              <a:rPr lang="en-US"/>
               <a:t>Second level</a:t>
             </a:r>
           </a:p>
           <a:p>
             <a:pPr lvl="2"/>
             <a:r>
-              <a:rPr lang="en-US" smtClean="0"/>
+              <a:rPr lang="en-US"/>
               <a:t>Third level</a:t>
             </a:r>
           </a:p>
           <a:p>
             <a:pPr lvl="3"/>
             <a:r>
-              <a:rPr lang="en-US" smtClean="0"/>
+              <a:rPr lang="en-US"/>
               <a:t>Fourth level</a:t>
             </a:r>
           </a:p>
           <a:p>
             <a:pPr lvl="4"/>
             <a:r>
-              <a:rPr lang="en-US" smtClean="0"/>
+              <a:rPr lang="en-US"/>
               <a:t>Fifth level</a:t>
             </a:r>
-            <a:endParaRPr lang="en-US"/>
           </a:p>
         </p:txBody>
       </p:sp>
@@ -1295,38 +1300,37 @@
           <a:p>
             <a:pPr lvl="0"/>
             <a:r>
-              <a:rPr lang="en-US" smtClean="0"/>
+              <a:rPr lang="en-US"/>
               <a:t>Click to edit Master text styles</a:t>
             </a:r>
           </a:p>
           <a:p>
             <a:pPr lvl="1"/>
             <a:r>
-              <a:rPr lang="en-US" smtClean="0"/>
+              <a:rPr lang="en-US"/>
               <a:t>Second level</a:t>
             </a:r>
           </a:p>
           <a:p>
             <a:pPr lvl="2"/>
             <a:r>
-              <a:rPr lang="en-US" smtClean="0"/>
+              <a:rPr lang="en-US"/>
               <a:t>Third level</a:t>
             </a:r>
           </a:p>
           <a:p>
             <a:pPr lvl="3"/>
             <a:r>
-              <a:rPr lang="en-US" smtClean="0"/>
+              <a:rPr lang="en-US"/>
               <a:t>Fourth level</a:t>
             </a:r>
           </a:p>
           <a:p>
             <a:pPr lvl="4"/>
             <a:r>
-              <a:rPr lang="en-US" smtClean="0"/>
+              <a:rPr lang="en-US"/>
               <a:t>Fifth level</a:t>
             </a:r>
-            <a:endParaRPr lang="en-US"/>
           </a:p>
         </p:txBody>
       </p:sp>
@@ -1347,7 +1351,7 @@
           <a:p>
             <a:fld id="{5BCAD085-E8A6-8845-BD4E-CB4CCA059FC4}" type="datetimeFigureOut">
               <a:rPr lang="en-US" smtClean="0"/>
-              <a:t>1/27/13</a:t>
+              <a:t>6/10/26</a:t>
             </a:fld>
             <a:endParaRPr lang="en-US"/>
           </a:p>
@@ -1445,10 +1449,9 @@
           </a:lstStyle>
           <a:p>
             <a:r>
-              <a:rPr lang="en-US" smtClean="0"/>
+              <a:rPr lang="en-US"/>
               <a:t>Click to edit Master title style</a:t>
             </a:r>
-            <a:endParaRPr lang="en-US"/>
           </a:p>
         </p:txBody>
       </p:sp>
@@ -1511,7 +1514,7 @@
           <a:p>
             <a:pPr lvl="0"/>
             <a:r>
-              <a:rPr lang="en-US" smtClean="0"/>
+              <a:rPr lang="en-US"/>
               <a:t>Click to edit Master text styles</a:t>
             </a:r>
           </a:p>
@@ -1567,38 +1570,37 @@
           <a:p>
             <a:pPr lvl="0"/>
             <a:r>
-              <a:rPr lang="en-US" smtClean="0"/>
+              <a:rPr lang="en-US"/>
               <a:t>Click to edit Master text styles</a:t>
             </a:r>
           </a:p>
           <a:p>
             <a:pPr lvl="1"/>
             <a:r>
-              <a:rPr lang="en-US" smtClean="0"/>
+              <a:rPr lang="en-US"/>
               <a:t>Second level</a:t>
             </a:r>
           </a:p>
           <a:p>
             <a:pPr lvl="2"/>
             <a:r>
-              <a:rPr lang="en-US" smtClean="0"/>
+              <a:rPr lang="en-US"/>
               <a:t>Third level</a:t>
             </a:r>
           </a:p>
           <a:p>
             <a:pPr lvl="3"/>
             <a:r>
-              <a:rPr lang="en-US" smtClean="0"/>
+              <a:rPr lang="en-US"/>
               <a:t>Fourth level</a:t>
             </a:r>
           </a:p>
           <a:p>
             <a:pPr lvl="4"/>
             <a:r>
-              <a:rPr lang="en-US" smtClean="0"/>
+              <a:rPr lang="en-US"/>
               <a:t>Fifth level</a:t>
             </a:r>
-            <a:endParaRPr lang="en-US"/>
           </a:p>
         </p:txBody>
       </p:sp>
@@ -1661,7 +1663,7 @@
           <a:p>
             <a:pPr lvl="0"/>
             <a:r>
-              <a:rPr lang="en-US" smtClean="0"/>
+              <a:rPr lang="en-US"/>
               <a:t>Click to edit Master text styles</a:t>
             </a:r>
           </a:p>
@@ -1717,38 +1719,37 @@
           <a:p>
             <a:pPr lvl="0"/>
             <a:r>
-              <a:rPr lang="en-US" smtClean="0"/>
+              <a:rPr lang="en-US"/>
               <a:t>Click to edit Master text styles</a:t>
             </a:r>
           </a:p>
           <a:p>
             <a:pPr lvl="1"/>
             <a:r>
-              <a:rPr lang="en-US" smtClean="0"/>
+              <a:rPr lang="en-US"/>
               <a:t>Second level</a:t>
             </a:r>
           </a:p>
           <a:p>
             <a:pPr lvl="2"/>
             <a:r>
-              <a:rPr lang="en-US" smtClean="0"/>
+              <a:rPr lang="en-US"/>
               <a:t>Third level</a:t>
             </a:r>
           </a:p>
           <a:p>
             <a:pPr lvl="3"/>
             <a:r>
-              <a:rPr lang="en-US" smtClean="0"/>
+              <a:rPr lang="en-US"/>
               <a:t>Fourth level</a:t>
             </a:r>
           </a:p>
           <a:p>
             <a:pPr lvl="4"/>
             <a:r>
-              <a:rPr lang="en-US" smtClean="0"/>
+              <a:rPr lang="en-US"/>
               <a:t>Fifth level</a:t>
             </a:r>
-            <a:endParaRPr lang="en-US"/>
           </a:p>
         </p:txBody>
       </p:sp>
@@ -1769,7 +1770,7 @@
           <a:p>
             <a:fld id="{5BCAD085-E8A6-8845-BD4E-CB4CCA059FC4}" type="datetimeFigureOut">
               <a:rPr lang="en-US" smtClean="0"/>
-              <a:t>1/27/13</a:t>
+              <a:t>6/10/26</a:t>
             </a:fld>
             <a:endParaRPr lang="en-US"/>
           </a:p>
@@ -1863,10 +1864,9 @@
           <a:lstStyle/>
           <a:p>
             <a:r>
-              <a:rPr lang="en-US" smtClean="0"/>
+              <a:rPr lang="en-US"/>
               <a:t>Click to edit Master title style</a:t>
             </a:r>
-            <a:endParaRPr lang="en-US"/>
           </a:p>
         </p:txBody>
       </p:sp>
@@ -1887,7 +1887,7 @@
           <a:p>
             <a:fld id="{5BCAD085-E8A6-8845-BD4E-CB4CCA059FC4}" type="datetimeFigureOut">
               <a:rPr lang="en-US" smtClean="0"/>
-              <a:t>1/27/13</a:t>
+              <a:t>6/10/26</a:t>
             </a:fld>
             <a:endParaRPr lang="en-US"/>
           </a:p>
@@ -1982,7 +1982,7 @@
           <a:p>
             <a:fld id="{5BCAD085-E8A6-8845-BD4E-CB4CCA059FC4}" type="datetimeFigureOut">
               <a:rPr lang="en-US" smtClean="0"/>
-              <a:t>1/27/13</a:t>
+              <a:t>6/10/26</a:t>
             </a:fld>
             <a:endParaRPr lang="en-US"/>
           </a:p>
@@ -2085,10 +2085,9 @@
           </a:lstStyle>
           <a:p>
             <a:r>
-              <a:rPr lang="en-US" smtClean="0"/>
+              <a:rPr lang="en-US"/>
               <a:t>Click to edit Master title style</a:t>
             </a:r>
-            <a:endParaRPr lang="en-US"/>
           </a:p>
         </p:txBody>
       </p:sp>
@@ -2142,38 +2141,37 @@
           <a:p>
             <a:pPr lvl="0"/>
             <a:r>
-              <a:rPr lang="en-US" smtClean="0"/>
+              <a:rPr lang="en-US"/>
               <a:t>Click to edit Master text styles</a:t>
             </a:r>
           </a:p>
           <a:p>
             <a:pPr lvl="1"/>
             <a:r>
-              <a:rPr lang="en-US" smtClean="0"/>
+              <a:rPr lang="en-US"/>
               <a:t>Second level</a:t>
             </a:r>
           </a:p>
           <a:p>
             <a:pPr lvl="2"/>
             <a:r>
-              <a:rPr lang="en-US" smtClean="0"/>
+              <a:rPr lang="en-US"/>
               <a:t>Third level</a:t>
             </a:r>
           </a:p>
           <a:p>
             <a:pPr lvl="3"/>
             <a:r>
-              <a:rPr lang="en-US" smtClean="0"/>
+              <a:rPr lang="en-US"/>
               <a:t>Fourth level</a:t>
             </a:r>
           </a:p>
           <a:p>
             <a:pPr lvl="4"/>
             <a:r>
-              <a:rPr lang="en-US" smtClean="0"/>
+              <a:rPr lang="en-US"/>
               <a:t>Fifth level</a:t>
             </a:r>
-            <a:endParaRPr lang="en-US"/>
           </a:p>
         </p:txBody>
       </p:sp>
@@ -2236,7 +2234,7 @@
           <a:p>
             <a:pPr lvl="0"/>
             <a:r>
-              <a:rPr lang="en-US" smtClean="0"/>
+              <a:rPr lang="en-US"/>
               <a:t>Click to edit Master text styles</a:t>
             </a:r>
           </a:p>
@@ -2259,7 +2257,7 @@
           <a:p>
             <a:fld id="{5BCAD085-E8A6-8845-BD4E-CB4CCA059FC4}" type="datetimeFigureOut">
               <a:rPr lang="en-US" smtClean="0"/>
-              <a:t>1/27/13</a:t>
+              <a:t>6/10/26</a:t>
             </a:fld>
             <a:endParaRPr lang="en-US"/>
           </a:p>
@@ -2362,10 +2360,9 @@
           </a:lstStyle>
           <a:p>
             <a:r>
-              <a:rPr lang="en-US" smtClean="0"/>
+              <a:rPr lang="en-US"/>
               <a:t>Click to edit Master title style</a:t>
             </a:r>
-            <a:endParaRPr lang="en-US"/>
           </a:p>
         </p:txBody>
       </p:sp>
@@ -2489,7 +2486,7 @@
           <a:p>
             <a:pPr lvl="0"/>
             <a:r>
-              <a:rPr lang="en-US" smtClean="0"/>
+              <a:rPr lang="en-US"/>
               <a:t>Click to edit Master text styles</a:t>
             </a:r>
           </a:p>
@@ -2512,7 +2509,7 @@
           <a:p>
             <a:fld id="{5BCAD085-E8A6-8845-BD4E-CB4CCA059FC4}" type="datetimeFigureOut">
               <a:rPr lang="en-US" smtClean="0"/>
-              <a:t>1/27/13</a:t>
+              <a:t>6/10/26</a:t>
             </a:fld>
             <a:endParaRPr lang="en-US"/>
           </a:p>
@@ -2621,10 +2618,9 @@
           <a:lstStyle/>
           <a:p>
             <a:r>
-              <a:rPr lang="en-US" smtClean="0"/>
+              <a:rPr lang="en-US"/>
               <a:t>Click to edit Master title style</a:t>
             </a:r>
-            <a:endParaRPr lang="en-US"/>
           </a:p>
         </p:txBody>
       </p:sp>
@@ -2655,38 +2651,37 @@
           <a:p>
             <a:pPr lvl="0"/>
             <a:r>
-              <a:rPr lang="en-US" smtClean="0"/>
+              <a:rPr lang="en-US"/>
               <a:t>Click to edit Master text styles</a:t>
             </a:r>
           </a:p>
           <a:p>
             <a:pPr lvl="1"/>
             <a:r>
-              <a:rPr lang="en-US" smtClean="0"/>
+              <a:rPr lang="en-US"/>
               <a:t>Second level</a:t>
             </a:r>
           </a:p>
           <a:p>
             <a:pPr lvl="2"/>
             <a:r>
-              <a:rPr lang="en-US" smtClean="0"/>
+              <a:rPr lang="en-US"/>
               <a:t>Third level</a:t>
             </a:r>
           </a:p>
           <a:p>
             <a:pPr lvl="3"/>
             <a:r>
-              <a:rPr lang="en-US" smtClean="0"/>
+              <a:rPr lang="en-US"/>
               <a:t>Fourth level</a:t>
             </a:r>
           </a:p>
           <a:p>
             <a:pPr lvl="4"/>
             <a:r>
-              <a:rPr lang="en-US" smtClean="0"/>
+              <a:rPr lang="en-US"/>
               <a:t>Fifth level</a:t>
             </a:r>
-            <a:endParaRPr lang="en-US"/>
           </a:p>
         </p:txBody>
       </p:sp>
@@ -2725,7 +2720,7 @@
           <a:p>
             <a:fld id="{5BCAD085-E8A6-8845-BD4E-CB4CCA059FC4}" type="datetimeFigureOut">
               <a:rPr lang="en-US" smtClean="0"/>
-              <a:t>1/27/13</a:t>
+              <a:t>6/10/26</a:t>
             </a:fld>
             <a:endParaRPr lang="en-US"/>
           </a:p>
@@ -3084,7 +3079,7 @@
 </file>
 
 <file path=ppt/slides/slide1.xml><?xml version="1.0" encoding="utf-8"?>
-<p:sld xmlns:a="http://schemas.openxmlformats.org/drawingml/2006/main" xmlns:p="http://schemas.openxmlformats.org/presentationml/2006/main" xmlns:r="http://schemas.openxmlformats.org/officeDocument/2006/relationships">
+<p:sld xmlns:a="http://schemas.openxmlformats.org/drawingml/2006/main" xmlns:r="http://schemas.openxmlformats.org/officeDocument/2006/relationships" xmlns:p="http://schemas.openxmlformats.org/presentationml/2006/main">
   <p:cSld>
     <p:bg>
       <p:bgPr>
@@ -3100,7 +3095,14 @@
         <p:cNvGrpSpPr/>
         <p:nvPr/>
       </p:nvGrpSpPr>
-      <p:grpSpPr/>
+      <p:grpSpPr>
+        <a:xfrm>
+          <a:off x="0" y="0"/>
+          <a:ext cx="0" cy="0"/>
+          <a:chOff x="0" y="0"/>
+          <a:chExt cx="0" cy="0"/>
+        </a:xfrm>
+      </p:grpSpPr>
       <p:sp>
         <p:nvSpPr>
           <p:cNvPr id="2" name="TextBox 1"/>
@@ -3181,7 +3183,7 @@
         </p:nvSpPr>
         <p:spPr>
           <a:xfrm>
-            <a:off x="914400" y="3108960"/>
+            <a:off x="914400" y="3246120"/>
             <a:ext cx="6217920" cy="914400"/>
           </a:xfrm>
           <a:prstGeom prst="rect">
@@ -3204,8 +3206,90 @@
               </a:defRPr>
             </a:pPr>
             <a:r>
-              <a:t>서로 다른 권한과 페르소나를 가진 에이전트들과 상호작용하며 사건을 해결하는 추리 게임</a:t>
-            </a:r>
+              <a:rPr dirty="0" err="1"/>
+              <a:t>서로</a:t>
+            </a:r>
+            <a:r>
+              <a:rPr dirty="0"/>
+              <a:t> </a:t>
+            </a:r>
+            <a:r>
+              <a:rPr dirty="0" err="1"/>
+              <a:t>다른</a:t>
+            </a:r>
+            <a:r>
+              <a:rPr dirty="0"/>
+              <a:t> </a:t>
+            </a:r>
+            <a:r>
+              <a:rPr dirty="0" err="1"/>
+              <a:t>권한과</a:t>
+            </a:r>
+            <a:r>
+              <a:rPr dirty="0"/>
+              <a:t> </a:t>
+            </a:r>
+            <a:r>
+              <a:rPr dirty="0" err="1"/>
+              <a:t>페르소나를</a:t>
+            </a:r>
+            <a:r>
+              <a:rPr dirty="0"/>
+              <a:t> </a:t>
+            </a:r>
+            <a:r>
+              <a:rPr dirty="0" err="1"/>
+              <a:t>가진</a:t>
+            </a:r>
+            <a:r>
+              <a:rPr dirty="0"/>
+              <a:t> </a:t>
+            </a:r>
+            <a:r>
+              <a:rPr dirty="0" err="1"/>
+              <a:t>에이전트들과</a:t>
+            </a:r>
+            <a:r>
+              <a:rPr dirty="0"/>
+              <a:t> </a:t>
+            </a:r>
+            <a:r>
+              <a:rPr dirty="0" err="1"/>
+              <a:t>상호작용하며</a:t>
+            </a:r>
+            <a:r>
+              <a:rPr dirty="0"/>
+              <a:t> </a:t>
+            </a:r>
+            <a:r>
+              <a:rPr dirty="0" err="1"/>
+              <a:t>사건을</a:t>
+            </a:r>
+            <a:r>
+              <a:rPr dirty="0"/>
+              <a:t> </a:t>
+            </a:r>
+            <a:r>
+              <a:rPr dirty="0" err="1"/>
+              <a:t>해결하는</a:t>
+            </a:r>
+            <a:r>
+              <a:rPr dirty="0"/>
+              <a:t> </a:t>
+            </a:r>
+            <a:r>
+              <a:rPr dirty="0" err="1"/>
+              <a:t>추리</a:t>
+            </a:r>
+            <a:r>
+              <a:rPr dirty="0"/>
+              <a:t> </a:t>
+            </a:r>
+            <a:r>
+              <a:rPr dirty="0" err="1"/>
+              <a:t>게임</a:t>
+            </a:r>
+            <a:endParaRPr dirty="0"/>
           </a:p>
         </p:txBody>
       </p:sp>
@@ -3251,6 +3335,7 @@
           <a:lstStyle/>
           <a:p>
             <a:pPr algn="ctr"/>
+            <a:endParaRPr/>
           </a:p>
         </p:txBody>
       </p:sp>
@@ -3262,8 +3347,8 @@
         </p:nvSpPr>
         <p:spPr>
           <a:xfrm>
-            <a:off x="1188720" y="4480560"/>
-            <a:ext cx="5394960" cy="822960"/>
+            <a:off x="1188720" y="4589056"/>
+            <a:ext cx="5394960" cy="600164"/>
           </a:xfrm>
           <a:prstGeom prst="rect">
             <a:avLst/>
@@ -3285,61 +3370,88 @@
               </a:defRPr>
             </a:pPr>
             <a:r>
-              <a:t>안녕하십니까?</a:t>
-            </a:r>
-            <a:br/>
-            <a:r>
-              <a:t>저희 조의 발표를 시작하겠습니다.</a:t>
-            </a:r>
-            <a:br/>
-            <a:r>
-              <a:t>"NPC가 단서를 주는 사람이 아니라, 자기 나름대로 범인을 찍는 사람이라면?"</a:t>
-            </a:r>
-          </a:p>
-        </p:txBody>
-      </p:sp>
-      <p:sp>
-        <p:nvSpPr>
-          <p:cNvPr id="7" name="Rounded Rectangle 6"/>
-          <p:cNvSpPr/>
-          <p:nvPr/>
-        </p:nvSpPr>
-        <p:spPr>
-          <a:xfrm>
-            <a:off x="7406640" y="2011680"/>
-            <a:ext cx="3840480" cy="2601468"/>
-          </a:xfrm>
-          <a:prstGeom prst="roundRect">
-            <a:avLst/>
-          </a:prstGeom>
-          <a:solidFill>
-            <a:srgbClr val="08090B"/>
-          </a:solidFill>
-          <a:ln w="12700">
-            <a:solidFill>
-              <a:srgbClr val="252832"/>
-            </a:solidFill>
-          </a:ln>
-        </p:spPr>
-        <p:style>
-          <a:lnRef idx="1">
-            <a:schemeClr val="accent1"/>
-          </a:lnRef>
-          <a:fillRef idx="3">
-            <a:schemeClr val="accent1"/>
-          </a:fillRef>
-          <a:effectRef idx="2">
-            <a:schemeClr val="accent1"/>
-          </a:effectRef>
-          <a:fontRef idx="minor">
-            <a:schemeClr val="lt1"/>
-          </a:fontRef>
-        </p:style>
-        <p:txBody>
-          <a:bodyPr rtlCol="0" anchor="ctr"/>
-          <a:lstStyle/>
-          <a:p>
-            <a:pPr algn="ctr"/>
+              <a:rPr lang="en-US" altLang="ko-KR" dirty="0"/>
+              <a:t>27</a:t>
+            </a:r>
+            <a:r>
+              <a:rPr lang="ko-KR" altLang="en-US" dirty="0"/>
+              <a:t>조</a:t>
+            </a:r>
+            <a:endParaRPr lang="en-US" altLang="ko-KR" dirty="0"/>
+          </a:p>
+          <a:p>
+            <a:pPr algn="l">
+              <a:defRPr sz="1300" b="1">
+                <a:solidFill>
+                  <a:srgbClr val="F4F4F5"/>
+                </a:solidFill>
+                <a:latin typeface="Malgun Gothic"/>
+              </a:defRPr>
+            </a:pPr>
+            <a:r>
+              <a:rPr lang="ko-KR" altLang="en-US" dirty="0"/>
+              <a:t>발표자</a:t>
+            </a:r>
+            <a:r>
+              <a:rPr lang="en-US" altLang="ko-KR" dirty="0"/>
+              <a:t>:</a:t>
+            </a:r>
+            <a:r>
+              <a:rPr lang="ko-KR" altLang="en-US" dirty="0"/>
+              <a:t> 정윤성</a:t>
+            </a:r>
+            <a:endParaRPr lang="en-US" altLang="ko-KR" dirty="0"/>
+          </a:p>
+          <a:p>
+            <a:pPr algn="l">
+              <a:defRPr sz="1300" b="1">
+                <a:solidFill>
+                  <a:srgbClr val="F4F4F5"/>
+                </a:solidFill>
+                <a:latin typeface="Malgun Gothic"/>
+              </a:defRPr>
+            </a:pPr>
+            <a:r>
+              <a:rPr lang="ko-KR" altLang="en-US" dirty="0"/>
+              <a:t>팀원</a:t>
+            </a:r>
+            <a:r>
+              <a:rPr lang="en-US" altLang="ko-KR" dirty="0"/>
+              <a:t>:</a:t>
+            </a:r>
+            <a:r>
+              <a:rPr lang="ko-KR" altLang="en-US" dirty="0"/>
+              <a:t> 김창영</a:t>
+            </a:r>
+            <a:r>
+              <a:rPr lang="en-US" altLang="ko-KR" dirty="0"/>
+              <a:t>,</a:t>
+            </a:r>
+            <a:r>
+              <a:rPr lang="ko-KR" altLang="en-US" dirty="0"/>
+              <a:t> 이은성</a:t>
+            </a:r>
+            <a:r>
+              <a:rPr lang="en-US" altLang="ko-KR" dirty="0"/>
+              <a:t>,</a:t>
+            </a:r>
+            <a:r>
+              <a:rPr lang="ko-KR" altLang="en-US" dirty="0"/>
+              <a:t> </a:t>
+            </a:r>
+            <a:r>
+              <a:rPr lang="ko-KR" altLang="en-US" dirty="0" err="1"/>
+              <a:t>정권호</a:t>
+            </a:r>
+            <a:r>
+              <a:rPr lang="en-US" altLang="ko-KR" dirty="0"/>
+              <a:t>,</a:t>
+            </a:r>
+            <a:r>
+              <a:rPr lang="ko-KR" altLang="en-US" dirty="0"/>
+              <a:t> 최은진</a:t>
+            </a:r>
+            <a:endParaRPr dirty="0"/>
           </a:p>
         </p:txBody>
       </p:sp>
@@ -3353,149 +3465,21 @@
         </p:nvPicPr>
         <p:blipFill>
           <a:blip r:embed="rId2"/>
+          <a:srcRect l="35122" r="35331"/>
           <a:stretch>
             <a:fillRect/>
           </a:stretch>
         </p:blipFill>
         <p:spPr>
           <a:xfrm>
-            <a:off x="7415784" y="2212848"/>
-            <a:ext cx="3822192" cy="2391156"/>
+            <a:off x="7695211" y="306476"/>
+            <a:ext cx="2952382" cy="6245047"/>
           </a:xfrm>
           <a:prstGeom prst="rect">
             <a:avLst/>
           </a:prstGeom>
         </p:spPr>
       </p:pic>
-      <p:sp>
-        <p:nvSpPr>
-          <p:cNvPr id="9" name="Oval 8"/>
-          <p:cNvSpPr/>
-          <p:nvPr/>
-        </p:nvSpPr>
-        <p:spPr>
-          <a:xfrm>
-            <a:off x="7516368" y="2084832"/>
-            <a:ext cx="54864" cy="54864"/>
-          </a:xfrm>
-          <a:prstGeom prst="ellipse">
-            <a:avLst/>
-          </a:prstGeom>
-          <a:solidFill>
-            <a:srgbClr val="FF5F56"/>
-          </a:solidFill>
-          <a:ln>
-            <a:noFill/>
-          </a:ln>
-        </p:spPr>
-        <p:style>
-          <a:lnRef idx="1">
-            <a:schemeClr val="accent1"/>
-          </a:lnRef>
-          <a:fillRef idx="3">
-            <a:schemeClr val="accent1"/>
-          </a:fillRef>
-          <a:effectRef idx="2">
-            <a:schemeClr val="accent1"/>
-          </a:effectRef>
-          <a:fontRef idx="minor">
-            <a:schemeClr val="lt1"/>
-          </a:fontRef>
-        </p:style>
-        <p:txBody>
-          <a:bodyPr rtlCol="0" anchor="ctr"/>
-          <a:lstStyle/>
-          <a:p>
-            <a:pPr algn="ctr"/>
-          </a:p>
-        </p:txBody>
-      </p:sp>
-      <p:sp>
-        <p:nvSpPr>
-          <p:cNvPr id="10" name="Oval 9"/>
-          <p:cNvSpPr/>
-          <p:nvPr/>
-        </p:nvSpPr>
-        <p:spPr>
-          <a:xfrm>
-            <a:off x="7607808" y="2084832"/>
-            <a:ext cx="54864" cy="54864"/>
-          </a:xfrm>
-          <a:prstGeom prst="ellipse">
-            <a:avLst/>
-          </a:prstGeom>
-          <a:solidFill>
-            <a:srgbClr val="FFBD2E"/>
-          </a:solidFill>
-          <a:ln>
-            <a:noFill/>
-          </a:ln>
-        </p:spPr>
-        <p:style>
-          <a:lnRef idx="1">
-            <a:schemeClr val="accent1"/>
-          </a:lnRef>
-          <a:fillRef idx="3">
-            <a:schemeClr val="accent1"/>
-          </a:fillRef>
-          <a:effectRef idx="2">
-            <a:schemeClr val="accent1"/>
-          </a:effectRef>
-          <a:fontRef idx="minor">
-            <a:schemeClr val="lt1"/>
-          </a:fontRef>
-        </p:style>
-        <p:txBody>
-          <a:bodyPr rtlCol="0" anchor="ctr"/>
-          <a:lstStyle/>
-          <a:p>
-            <a:pPr algn="ctr"/>
-          </a:p>
-        </p:txBody>
-      </p:sp>
-      <p:sp>
-        <p:nvSpPr>
-          <p:cNvPr id="11" name="Oval 10"/>
-          <p:cNvSpPr/>
-          <p:nvPr/>
-        </p:nvSpPr>
-        <p:spPr>
-          <a:xfrm>
-            <a:off x="7699248" y="2084832"/>
-            <a:ext cx="54864" cy="54864"/>
-          </a:xfrm>
-          <a:prstGeom prst="ellipse">
-            <a:avLst/>
-          </a:prstGeom>
-          <a:solidFill>
-            <a:srgbClr val="27C93F"/>
-          </a:solidFill>
-          <a:ln>
-            <a:noFill/>
-          </a:ln>
-        </p:spPr>
-        <p:style>
-          <a:lnRef idx="1">
-            <a:schemeClr val="accent1"/>
-          </a:lnRef>
-          <a:fillRef idx="3">
-            <a:schemeClr val="accent1"/>
-          </a:fillRef>
-          <a:effectRef idx="2">
-            <a:schemeClr val="accent1"/>
-          </a:effectRef>
-          <a:fontRef idx="minor">
-            <a:schemeClr val="lt1"/>
-          </a:fontRef>
-        </p:style>
-        <p:txBody>
-          <a:bodyPr rtlCol="0" anchor="ctr"/>
-          <a:lstStyle/>
-          <a:p>
-            <a:pPr algn="ctr"/>
-          </a:p>
-        </p:txBody>
-      </p:sp>
       <p:sp>
         <p:nvSpPr>
           <p:cNvPr id="12" name="TextBox 11"/>
@@ -3541,7 +3525,7 @@
 </file>
 
 <file path=ppt/slides/slide2.xml><?xml version="1.0" encoding="utf-8"?>
-<p:sld xmlns:a="http://schemas.openxmlformats.org/drawingml/2006/main" xmlns:p="http://schemas.openxmlformats.org/presentationml/2006/main" xmlns:r="http://schemas.openxmlformats.org/officeDocument/2006/relationships">
+<p:sld xmlns:a="http://schemas.openxmlformats.org/drawingml/2006/main" xmlns:r="http://schemas.openxmlformats.org/officeDocument/2006/relationships" xmlns:p="http://schemas.openxmlformats.org/presentationml/2006/main">
   <p:cSld>
     <p:bg>
       <p:bgPr>
@@ -3557,7 +3541,14 @@
         <p:cNvGrpSpPr/>
         <p:nvPr/>
       </p:nvGrpSpPr>
-      <p:grpSpPr/>
+      <p:grpSpPr>
+        <a:xfrm>
+          <a:off x="0" y="0"/>
+          <a:ext cx="0" cy="0"/>
+          <a:chOff x="0" y="0"/>
+          <a:chExt cx="0" cy="0"/>
+        </a:xfrm>
+      </p:grpSpPr>
       <p:sp>
         <p:nvSpPr>
           <p:cNvPr id="2" name="TextBox 1"/>
@@ -3708,6 +3699,7 @@
           <a:lstStyle/>
           <a:p>
             <a:pPr algn="ctr"/>
+            <a:endParaRPr/>
           </a:p>
         </p:txBody>
       </p:sp>
@@ -3745,8 +3737,26 @@
               </a:defRPr>
             </a:pPr>
             <a:r>
-              <a:t>기존 게임의 아쉬움</a:t>
-            </a:r>
+              <a:rPr dirty="0" err="1"/>
+              <a:t>기존</a:t>
+            </a:r>
+            <a:r>
+              <a:rPr dirty="0"/>
+              <a:t> </a:t>
+            </a:r>
+            <a:r>
+              <a:rPr dirty="0" err="1"/>
+              <a:t>게임의</a:t>
+            </a:r>
+            <a:r>
+              <a:rPr dirty="0"/>
+              <a:t> </a:t>
+            </a:r>
+            <a:r>
+              <a:rPr dirty="0" err="1"/>
+              <a:t>아쉬움</a:t>
+            </a:r>
+            <a:endParaRPr dirty="0"/>
           </a:p>
           <a:p>
             <a:pPr>
@@ -3761,20 +3771,336 @@
               </a:defRPr>
             </a:pPr>
             <a:r>
-              <a:t>• 수동적인 스토리라인</a:t>
-            </a:r>
-            <a:br/>
-            <a:r>
-              <a:t>  정해진 선택지 중 하나를 골라가며 추리를 진행해야 하기에 플레이어가 스스로 생각하기보다 짜인 스토리를 수동적으로 따라가는 한계가 있습니다.</a:t>
-            </a:r>
-            <a:br/>
-            <a:br/>
-            <a:r>
-              <a:t>• 단순 정보 전달자</a:t>
-            </a:r>
-            <a:br/>
-            <a:r>
-              <a:t>  최근 AI 에이전트를 도입한 추리 게임 역시 에이전트들이 단순히 단서를 보관하고 일방적으로 전달하는 단순 도구 역할에 머무르고 있습니다.</a:t>
+              <a:rPr dirty="0"/>
+              <a:t>• </a:t>
+            </a:r>
+            <a:r>
+              <a:rPr dirty="0" err="1"/>
+              <a:t>수동적인</a:t>
+            </a:r>
+            <a:r>
+              <a:rPr dirty="0"/>
+              <a:t> </a:t>
+            </a:r>
+            <a:r>
+              <a:rPr dirty="0" err="1"/>
+              <a:t>스토리라인</a:t>
+            </a:r>
+            <a:br>
+              <a:rPr dirty="0"/>
+            </a:br>
+            <a:r>
+              <a:rPr dirty="0"/>
+              <a:t>  </a:t>
+            </a:r>
+            <a:r>
+              <a:rPr dirty="0" err="1"/>
+              <a:t>정해진</a:t>
+            </a:r>
+            <a:r>
+              <a:rPr dirty="0"/>
+              <a:t> </a:t>
+            </a:r>
+            <a:r>
+              <a:rPr dirty="0" err="1"/>
+              <a:t>선택지</a:t>
+            </a:r>
+            <a:r>
+              <a:rPr dirty="0"/>
+              <a:t> </a:t>
+            </a:r>
+            <a:r>
+              <a:rPr dirty="0" err="1"/>
+              <a:t>중</a:t>
+            </a:r>
+            <a:r>
+              <a:rPr dirty="0"/>
+              <a:t> </a:t>
+            </a:r>
+            <a:r>
+              <a:rPr dirty="0" err="1"/>
+              <a:t>하나를</a:t>
+            </a:r>
+            <a:r>
+              <a:rPr dirty="0"/>
+              <a:t> </a:t>
+            </a:r>
+            <a:r>
+              <a:rPr dirty="0" err="1"/>
+              <a:t>골라가며</a:t>
+            </a:r>
+            <a:r>
+              <a:rPr dirty="0"/>
+              <a:t> </a:t>
+            </a:r>
+            <a:r>
+              <a:rPr dirty="0" err="1"/>
+              <a:t>추리를</a:t>
+            </a:r>
+            <a:r>
+              <a:rPr dirty="0"/>
+              <a:t> </a:t>
+            </a:r>
+            <a:r>
+              <a:rPr dirty="0" err="1"/>
+              <a:t>진행해야</a:t>
+            </a:r>
+            <a:r>
+              <a:rPr dirty="0"/>
+              <a:t> </a:t>
+            </a:r>
+            <a:r>
+              <a:rPr dirty="0" err="1"/>
+              <a:t>하기에</a:t>
+            </a:r>
+            <a:r>
+              <a:rPr dirty="0"/>
+              <a:t> </a:t>
+            </a:r>
+            <a:r>
+              <a:rPr dirty="0" err="1"/>
+              <a:t>플레이어가</a:t>
+            </a:r>
+            <a:r>
+              <a:rPr dirty="0"/>
+              <a:t> </a:t>
+            </a:r>
+            <a:r>
+              <a:rPr dirty="0" err="1"/>
+              <a:t>스스로</a:t>
+            </a:r>
+            <a:r>
+              <a:rPr dirty="0"/>
+              <a:t> </a:t>
+            </a:r>
+            <a:r>
+              <a:rPr dirty="0" err="1"/>
+              <a:t>생각하기보다</a:t>
+            </a:r>
+            <a:r>
+              <a:rPr dirty="0"/>
+              <a:t> </a:t>
+            </a:r>
+            <a:r>
+              <a:rPr dirty="0" err="1"/>
+              <a:t>짜인</a:t>
+            </a:r>
+            <a:r>
+              <a:rPr dirty="0"/>
+              <a:t> </a:t>
+            </a:r>
+            <a:r>
+              <a:rPr dirty="0" err="1"/>
+              <a:t>스토리를</a:t>
+            </a:r>
+            <a:r>
+              <a:rPr dirty="0"/>
+              <a:t> </a:t>
+            </a:r>
+            <a:r>
+              <a:rPr dirty="0" err="1"/>
+              <a:t>수동적으로</a:t>
+            </a:r>
+            <a:r>
+              <a:rPr dirty="0"/>
+              <a:t> </a:t>
+            </a:r>
+            <a:r>
+              <a:rPr dirty="0" err="1"/>
+              <a:t>따라가는</a:t>
+            </a:r>
+            <a:r>
+              <a:rPr dirty="0"/>
+              <a:t> </a:t>
+            </a:r>
+            <a:r>
+              <a:rPr dirty="0" err="1"/>
+              <a:t>한계가</a:t>
+            </a:r>
+            <a:r>
+              <a:rPr dirty="0"/>
+              <a:t> </a:t>
+            </a:r>
+            <a:r>
+              <a:rPr dirty="0" err="1"/>
+              <a:t>있습니다</a:t>
+            </a:r>
+            <a:r>
+              <a:rPr dirty="0"/>
+              <a:t>.</a:t>
+            </a:r>
+            <a:br>
+              <a:rPr dirty="0"/>
+            </a:br>
+            <a:br>
+              <a:rPr dirty="0"/>
+            </a:br>
+            <a:r>
+              <a:rPr dirty="0"/>
+              <a:t>• </a:t>
+            </a:r>
+            <a:r>
+              <a:rPr dirty="0" err="1"/>
+              <a:t>단순</a:t>
+            </a:r>
+            <a:r>
+              <a:rPr dirty="0"/>
+              <a:t> </a:t>
+            </a:r>
+            <a:r>
+              <a:rPr dirty="0" err="1"/>
+              <a:t>정보</a:t>
+            </a:r>
+            <a:r>
+              <a:rPr dirty="0"/>
+              <a:t> </a:t>
+            </a:r>
+            <a:r>
+              <a:rPr dirty="0" err="1"/>
+              <a:t>전달자</a:t>
+            </a:r>
+            <a:br>
+              <a:rPr dirty="0"/>
+            </a:br>
+            <a:r>
+              <a:rPr dirty="0"/>
+              <a:t>  </a:t>
+            </a:r>
+            <a:r>
+              <a:rPr dirty="0" err="1"/>
+              <a:t>최근</a:t>
+            </a:r>
+            <a:r>
+              <a:rPr dirty="0"/>
+              <a:t> AI </a:t>
+            </a:r>
+            <a:r>
+              <a:rPr dirty="0" err="1"/>
+              <a:t>에이전트를</a:t>
+            </a:r>
+            <a:r>
+              <a:rPr dirty="0"/>
+              <a:t> </a:t>
+            </a:r>
+            <a:r>
+              <a:rPr dirty="0" err="1"/>
+              <a:t>도입한</a:t>
+            </a:r>
+            <a:r>
+              <a:rPr dirty="0"/>
+              <a:t> </a:t>
+            </a:r>
+            <a:r>
+              <a:rPr dirty="0" err="1"/>
+              <a:t>추리</a:t>
+            </a:r>
+            <a:r>
+              <a:rPr dirty="0"/>
+              <a:t> </a:t>
+            </a:r>
+            <a:r>
+              <a:rPr dirty="0" err="1"/>
+              <a:t>게임</a:t>
+            </a:r>
+            <a:r>
+              <a:rPr dirty="0"/>
+              <a:t> </a:t>
+            </a:r>
+            <a:r>
+              <a:rPr dirty="0" err="1"/>
+              <a:t>역시</a:t>
+            </a:r>
+            <a:r>
+              <a:rPr dirty="0"/>
+              <a:t> </a:t>
+            </a:r>
+            <a:r>
+              <a:rPr dirty="0" err="1"/>
+              <a:t>에이전트들이</a:t>
+            </a:r>
+            <a:r>
+              <a:rPr dirty="0"/>
+              <a:t> </a:t>
+            </a:r>
+            <a:r>
+              <a:rPr dirty="0" err="1"/>
+              <a:t>단순히</a:t>
+            </a:r>
+            <a:r>
+              <a:rPr dirty="0"/>
+              <a:t> </a:t>
+            </a:r>
+            <a:r>
+              <a:rPr dirty="0" err="1"/>
+              <a:t>단서를</a:t>
+            </a:r>
+            <a:r>
+              <a:rPr dirty="0"/>
+              <a:t> </a:t>
+            </a:r>
+            <a:r>
+              <a:rPr dirty="0" err="1"/>
+              <a:t>보관하고</a:t>
+            </a:r>
+            <a:r>
+              <a:rPr dirty="0"/>
+              <a:t> </a:t>
+            </a:r>
+            <a:r>
+              <a:rPr dirty="0" err="1"/>
+              <a:t>일방적으로</a:t>
+            </a:r>
+            <a:r>
+              <a:rPr dirty="0"/>
+              <a:t> </a:t>
+            </a:r>
+            <a:r>
+              <a:rPr dirty="0" err="1"/>
+              <a:t>전달하는</a:t>
+            </a:r>
+            <a:r>
+              <a:rPr dirty="0"/>
+              <a:t> </a:t>
+            </a:r>
+            <a:r>
+              <a:rPr dirty="0" err="1"/>
+              <a:t>단순</a:t>
+            </a:r>
+            <a:r>
+              <a:rPr dirty="0"/>
+              <a:t> </a:t>
+            </a:r>
+            <a:r>
+              <a:rPr dirty="0" err="1"/>
+              <a:t>도구</a:t>
+            </a:r>
+            <a:r>
+              <a:rPr dirty="0"/>
+              <a:t> </a:t>
+            </a:r>
+            <a:r>
+              <a:rPr dirty="0" err="1"/>
+              <a:t>역할에</a:t>
+            </a:r>
+            <a:r>
+              <a:rPr dirty="0"/>
+              <a:t> </a:t>
+            </a:r>
+            <a:r>
+              <a:rPr dirty="0" err="1"/>
+              <a:t>머무르고</a:t>
+            </a:r>
+            <a:r>
+              <a:rPr dirty="0"/>
+              <a:t> </a:t>
+            </a:r>
+            <a:r>
+              <a:rPr dirty="0" err="1"/>
+              <a:t>있습니다</a:t>
+            </a:r>
+            <a:r>
+              <a:rPr dirty="0"/>
+              <a:t>.</a:t>
             </a:r>
           </a:p>
         </p:txBody>
@@ -3821,6 +4147,7 @@
           <a:lstStyle/>
           <a:p>
             <a:pPr algn="ctr"/>
+            <a:endParaRPr/>
           </a:p>
         </p:txBody>
       </p:sp>
@@ -3858,8 +4185,34 @@
               </a:defRPr>
             </a:pPr>
             <a:r>
-              <a:t>우리 서비스의 핵심 가치</a:t>
-            </a:r>
+              <a:rPr dirty="0" err="1"/>
+              <a:t>우리</a:t>
+            </a:r>
+            <a:r>
+              <a:rPr dirty="0"/>
+              <a:t> </a:t>
+            </a:r>
+            <a:r>
+              <a:rPr dirty="0" err="1"/>
+              <a:t>서비스의</a:t>
+            </a:r>
+            <a:r>
+              <a:rPr dirty="0"/>
+              <a:t> </a:t>
+            </a:r>
+            <a:r>
+              <a:rPr dirty="0" err="1"/>
+              <a:t>핵심</a:t>
+            </a:r>
+            <a:r>
+              <a:rPr dirty="0"/>
+              <a:t> </a:t>
+            </a:r>
+            <a:r>
+              <a:rPr dirty="0" err="1"/>
+              <a:t>가치</a:t>
+            </a:r>
+            <a:endParaRPr dirty="0"/>
           </a:p>
           <a:p>
             <a:pPr>
@@ -3874,20 +4227,360 @@
               </a:defRPr>
             </a:pPr>
             <a:r>
-              <a:t>• 능동적인 불완전 추리자</a:t>
-            </a:r>
-            <a:br/>
-            <a:r>
-              <a:t>  각 에이전트들이 자신에게 할당된 고유한 시스템 권한과 페르소나만을 바탕으로 사건을 해석하며, 서로를 능동적으로 의심하고 불완전한 추리를 전개합니다.</a:t>
-            </a:r>
-            <a:br/>
-            <a:br/>
-            <a:r>
-              <a:t>• 진짜 근거를 가려내는 재미</a:t>
-            </a:r>
-            <a:br/>
-            <a:r>
-              <a:t>  이들의 그럴듯한 주장 속 모순과 객관적 로그 단서를 대조하여 플레이어가 스스로 진짜 증거를 가려내는 추리 본연의 재미를 선사합니다.</a:t>
+              <a:rPr dirty="0"/>
+              <a:t>• </a:t>
+            </a:r>
+            <a:r>
+              <a:rPr dirty="0" err="1"/>
+              <a:t>능동적인</a:t>
+            </a:r>
+            <a:r>
+              <a:rPr dirty="0"/>
+              <a:t> </a:t>
+            </a:r>
+            <a:r>
+              <a:rPr dirty="0" err="1"/>
+              <a:t>불완전</a:t>
+            </a:r>
+            <a:r>
+              <a:rPr dirty="0"/>
+              <a:t> </a:t>
+            </a:r>
+            <a:r>
+              <a:rPr dirty="0" err="1"/>
+              <a:t>추리자</a:t>
+            </a:r>
+            <a:br>
+              <a:rPr dirty="0"/>
+            </a:br>
+            <a:r>
+              <a:rPr dirty="0"/>
+              <a:t>  </a:t>
+            </a:r>
+            <a:r>
+              <a:rPr dirty="0" err="1"/>
+              <a:t>각</a:t>
+            </a:r>
+            <a:r>
+              <a:rPr dirty="0"/>
+              <a:t> </a:t>
+            </a:r>
+            <a:r>
+              <a:rPr dirty="0" err="1"/>
+              <a:t>에이전트들이</a:t>
+            </a:r>
+            <a:r>
+              <a:rPr dirty="0"/>
+              <a:t> </a:t>
+            </a:r>
+            <a:r>
+              <a:rPr dirty="0" err="1"/>
+              <a:t>자신에게</a:t>
+            </a:r>
+            <a:r>
+              <a:rPr dirty="0"/>
+              <a:t> </a:t>
+            </a:r>
+            <a:r>
+              <a:rPr dirty="0" err="1"/>
+              <a:t>할당된</a:t>
+            </a:r>
+            <a:r>
+              <a:rPr dirty="0"/>
+              <a:t> </a:t>
+            </a:r>
+            <a:r>
+              <a:rPr dirty="0" err="1"/>
+              <a:t>고유한</a:t>
+            </a:r>
+            <a:r>
+              <a:rPr dirty="0"/>
+              <a:t> </a:t>
+            </a:r>
+            <a:r>
+              <a:rPr dirty="0" err="1"/>
+              <a:t>시스템</a:t>
+            </a:r>
+            <a:r>
+              <a:rPr dirty="0"/>
+              <a:t> </a:t>
+            </a:r>
+            <a:r>
+              <a:rPr dirty="0" err="1"/>
+              <a:t>권한과</a:t>
+            </a:r>
+            <a:r>
+              <a:rPr dirty="0"/>
+              <a:t> </a:t>
+            </a:r>
+            <a:r>
+              <a:rPr dirty="0" err="1"/>
+              <a:t>페르소나만을</a:t>
+            </a:r>
+            <a:r>
+              <a:rPr dirty="0"/>
+              <a:t> </a:t>
+            </a:r>
+            <a:r>
+              <a:rPr dirty="0" err="1"/>
+              <a:t>바탕으로</a:t>
+            </a:r>
+            <a:r>
+              <a:rPr dirty="0"/>
+              <a:t> </a:t>
+            </a:r>
+            <a:r>
+              <a:rPr dirty="0" err="1"/>
+              <a:t>사건을</a:t>
+            </a:r>
+            <a:r>
+              <a:rPr dirty="0"/>
+              <a:t> </a:t>
+            </a:r>
+            <a:r>
+              <a:rPr dirty="0" err="1"/>
+              <a:t>해석하며</a:t>
+            </a:r>
+            <a:r>
+              <a:rPr dirty="0"/>
+              <a:t>, </a:t>
+            </a:r>
+            <a:r>
+              <a:rPr dirty="0" err="1"/>
+              <a:t>서로를</a:t>
+            </a:r>
+            <a:r>
+              <a:rPr dirty="0"/>
+              <a:t> </a:t>
+            </a:r>
+            <a:r>
+              <a:rPr dirty="0" err="1"/>
+              <a:t>능동적으로</a:t>
+            </a:r>
+            <a:r>
+              <a:rPr dirty="0"/>
+              <a:t> </a:t>
+            </a:r>
+            <a:r>
+              <a:rPr dirty="0" err="1"/>
+              <a:t>의심하고</a:t>
+            </a:r>
+            <a:r>
+              <a:rPr dirty="0"/>
+              <a:t> </a:t>
+            </a:r>
+            <a:r>
+              <a:rPr dirty="0" err="1"/>
+              <a:t>불완전한</a:t>
+            </a:r>
+            <a:r>
+              <a:rPr dirty="0"/>
+              <a:t> </a:t>
+            </a:r>
+            <a:r>
+              <a:rPr dirty="0" err="1"/>
+              <a:t>추리를</a:t>
+            </a:r>
+            <a:r>
+              <a:rPr dirty="0"/>
+              <a:t> </a:t>
+            </a:r>
+            <a:r>
+              <a:rPr dirty="0" err="1"/>
+              <a:t>전개합니다</a:t>
+            </a:r>
+            <a:r>
+              <a:rPr dirty="0"/>
+              <a:t>.</a:t>
+            </a:r>
+            <a:br>
+              <a:rPr dirty="0"/>
+            </a:br>
+            <a:br>
+              <a:rPr dirty="0"/>
+            </a:br>
+            <a:r>
+              <a:rPr dirty="0"/>
+              <a:t>• </a:t>
+            </a:r>
+            <a:r>
+              <a:rPr dirty="0" err="1"/>
+              <a:t>진짜</a:t>
+            </a:r>
+            <a:r>
+              <a:rPr dirty="0"/>
+              <a:t> </a:t>
+            </a:r>
+            <a:r>
+              <a:rPr dirty="0" err="1"/>
+              <a:t>근거를</a:t>
+            </a:r>
+            <a:r>
+              <a:rPr dirty="0"/>
+              <a:t> </a:t>
+            </a:r>
+            <a:r>
+              <a:rPr dirty="0" err="1"/>
+              <a:t>가려내는</a:t>
+            </a:r>
+            <a:r>
+              <a:rPr dirty="0"/>
+              <a:t> </a:t>
+            </a:r>
+            <a:r>
+              <a:rPr dirty="0" err="1"/>
+              <a:t>재미</a:t>
+            </a:r>
+            <a:br>
+              <a:rPr dirty="0"/>
+            </a:br>
+            <a:r>
+              <a:rPr dirty="0"/>
+              <a:t>  </a:t>
+            </a:r>
+            <a:r>
+              <a:rPr dirty="0" err="1"/>
+              <a:t>이들의</a:t>
+            </a:r>
+            <a:r>
+              <a:rPr dirty="0"/>
+              <a:t> </a:t>
+            </a:r>
+            <a:r>
+              <a:rPr dirty="0" err="1"/>
+              <a:t>그럴듯한</a:t>
+            </a:r>
+            <a:r>
+              <a:rPr dirty="0"/>
+              <a:t> </a:t>
+            </a:r>
+            <a:r>
+              <a:rPr dirty="0" err="1"/>
+              <a:t>주장</a:t>
+            </a:r>
+            <a:r>
+              <a:rPr dirty="0"/>
+              <a:t> </a:t>
+            </a:r>
+            <a:r>
+              <a:rPr dirty="0" err="1"/>
+              <a:t>속</a:t>
+            </a:r>
+            <a:r>
+              <a:rPr dirty="0"/>
+              <a:t> </a:t>
+            </a:r>
+            <a:r>
+              <a:rPr dirty="0" err="1"/>
+              <a:t>모순과</a:t>
+            </a:r>
+            <a:r>
+              <a:rPr dirty="0"/>
+              <a:t> </a:t>
+            </a:r>
+            <a:r>
+              <a:rPr dirty="0" err="1"/>
+              <a:t>객관적</a:t>
+            </a:r>
+            <a:r>
+              <a:rPr dirty="0"/>
+              <a:t> </a:t>
+            </a:r>
+            <a:r>
+              <a:rPr dirty="0" err="1"/>
+              <a:t>로그</a:t>
+            </a:r>
+            <a:r>
+              <a:rPr dirty="0"/>
+              <a:t> </a:t>
+            </a:r>
+            <a:r>
+              <a:rPr dirty="0" err="1"/>
+              <a:t>단서를</a:t>
+            </a:r>
+            <a:r>
+              <a:rPr dirty="0"/>
+              <a:t> </a:t>
+            </a:r>
+            <a:r>
+              <a:rPr dirty="0" err="1"/>
+              <a:t>대조하여</a:t>
+            </a:r>
+            <a:r>
+              <a:rPr dirty="0"/>
+              <a:t> </a:t>
+            </a:r>
+            <a:r>
+              <a:rPr dirty="0" err="1"/>
+              <a:t>플레이어가</a:t>
+            </a:r>
+            <a:r>
+              <a:rPr dirty="0"/>
+              <a:t> </a:t>
+            </a:r>
+            <a:r>
+              <a:rPr dirty="0" err="1"/>
+              <a:t>스스로</a:t>
+            </a:r>
+            <a:r>
+              <a:rPr dirty="0"/>
+              <a:t> </a:t>
+            </a:r>
+            <a:r>
+              <a:rPr dirty="0" err="1"/>
+              <a:t>진짜</a:t>
+            </a:r>
+            <a:r>
+              <a:rPr dirty="0"/>
+              <a:t> </a:t>
+            </a:r>
+            <a:r>
+              <a:rPr dirty="0" err="1"/>
+              <a:t>증거를</a:t>
+            </a:r>
+            <a:r>
+              <a:rPr dirty="0"/>
+              <a:t> </a:t>
+            </a:r>
+            <a:r>
+              <a:rPr dirty="0" err="1"/>
+              <a:t>가려내는</a:t>
+            </a:r>
+            <a:r>
+              <a:rPr dirty="0"/>
+              <a:t> </a:t>
+            </a:r>
+            <a:r>
+              <a:rPr dirty="0" err="1"/>
+              <a:t>추리</a:t>
+            </a:r>
+            <a:r>
+              <a:rPr dirty="0"/>
+              <a:t> </a:t>
+            </a:r>
+            <a:r>
+              <a:rPr dirty="0" err="1"/>
+              <a:t>본연의</a:t>
+            </a:r>
+            <a:r>
+              <a:rPr dirty="0"/>
+              <a:t> </a:t>
+            </a:r>
+            <a:r>
+              <a:rPr dirty="0" err="1"/>
+              <a:t>재미를</a:t>
+            </a:r>
+            <a:r>
+              <a:rPr dirty="0"/>
+              <a:t> </a:t>
+            </a:r>
+            <a:r>
+              <a:rPr dirty="0" err="1"/>
+              <a:t>선사합니다</a:t>
+            </a:r>
+            <a:r>
+              <a:rPr dirty="0"/>
+              <a:t>.</a:t>
             </a:r>
           </a:p>
         </p:txBody>
@@ -3937,7 +4630,7 @@
 </file>
 
 <file path=ppt/slides/slide3.xml><?xml version="1.0" encoding="utf-8"?>
-<p:sld xmlns:a="http://schemas.openxmlformats.org/drawingml/2006/main" xmlns:p="http://schemas.openxmlformats.org/presentationml/2006/main" xmlns:r="http://schemas.openxmlformats.org/officeDocument/2006/relationships">
+<p:sld xmlns:a="http://schemas.openxmlformats.org/drawingml/2006/main" xmlns:r="http://schemas.openxmlformats.org/officeDocument/2006/relationships" xmlns:p="http://schemas.openxmlformats.org/presentationml/2006/main">
   <p:cSld>
     <p:bg>
       <p:bgPr>
@@ -3953,7 +4646,14 @@
         <p:cNvGrpSpPr/>
         <p:nvPr/>
       </p:nvGrpSpPr>
-      <p:grpSpPr/>
+      <p:grpSpPr>
+        <a:xfrm>
+          <a:off x="0" y="0"/>
+          <a:ext cx="0" cy="0"/>
+          <a:chOff x="0" y="0"/>
+          <a:chExt cx="0" cy="0"/>
+        </a:xfrm>
+      </p:grpSpPr>
       <p:sp>
         <p:nvSpPr>
           <p:cNvPr id="2" name="TextBox 1"/>
@@ -4104,6 +4804,7 @@
           <a:lstStyle/>
           <a:p>
             <a:pPr algn="ctr"/>
+            <a:endParaRPr/>
           </a:p>
         </p:txBody>
       </p:sp>
@@ -4204,6 +4905,7 @@
           <a:lstStyle/>
           <a:p>
             <a:pPr algn="ctr"/>
+            <a:endParaRPr/>
           </a:p>
         </p:txBody>
       </p:sp>
@@ -4304,6 +5006,7 @@
           <a:lstStyle/>
           <a:p>
             <a:pPr algn="ctr"/>
+            <a:endParaRPr/>
           </a:p>
         </p:txBody>
       </p:sp>
@@ -4359,51 +5062,6 @@
             <a:r>
               <a:t>단서와 주장을 비교해 범인(오케스트레이터 ARIA), 동기, 핵심 증거를 최종 제출하여 성공 판정 피드백 수신</a:t>
             </a:r>
-          </a:p>
-        </p:txBody>
-      </p:sp>
-      <p:sp>
-        <p:nvSpPr>
-          <p:cNvPr id="11" name="Rounded Rectangle 10"/>
-          <p:cNvSpPr/>
-          <p:nvPr/>
-        </p:nvSpPr>
-        <p:spPr>
-          <a:xfrm>
-            <a:off x="7406640" y="2011680"/>
-            <a:ext cx="3840480" cy="2601468"/>
-          </a:xfrm>
-          <a:prstGeom prst="roundRect">
-            <a:avLst/>
-          </a:prstGeom>
-          <a:solidFill>
-            <a:srgbClr val="08090B"/>
-          </a:solidFill>
-          <a:ln w="12700">
-            <a:solidFill>
-              <a:srgbClr val="252832"/>
-            </a:solidFill>
-          </a:ln>
-        </p:spPr>
-        <p:style>
-          <a:lnRef idx="1">
-            <a:schemeClr val="accent1"/>
-          </a:lnRef>
-          <a:fillRef idx="3">
-            <a:schemeClr val="accent1"/>
-          </a:fillRef>
-          <a:effectRef idx="2">
-            <a:schemeClr val="accent1"/>
-          </a:effectRef>
-          <a:fontRef idx="minor">
-            <a:schemeClr val="lt1"/>
-          </a:fontRef>
-        </p:style>
-        <p:txBody>
-          <a:bodyPr rtlCol="0" anchor="ctr"/>
-          <a:lstStyle/>
-          <a:p>
-            <a:pPr algn="ctr"/>
           </a:p>
         </p:txBody>
       </p:sp>
@@ -4417,149 +5075,21 @@
         </p:nvPicPr>
         <p:blipFill>
           <a:blip r:embed="rId2"/>
+          <a:srcRect l="34933" r="34912"/>
           <a:stretch>
             <a:fillRect/>
           </a:stretch>
         </p:blipFill>
         <p:spPr>
           <a:xfrm>
-            <a:off x="7415784" y="2212848"/>
-            <a:ext cx="3822192" cy="2391156"/>
+            <a:off x="7362702" y="271536"/>
+            <a:ext cx="3045525" cy="6312144"/>
           </a:xfrm>
           <a:prstGeom prst="rect">
             <a:avLst/>
           </a:prstGeom>
         </p:spPr>
       </p:pic>
-      <p:sp>
-        <p:nvSpPr>
-          <p:cNvPr id="13" name="Oval 12"/>
-          <p:cNvSpPr/>
-          <p:nvPr/>
-        </p:nvSpPr>
-        <p:spPr>
-          <a:xfrm>
-            <a:off x="7516368" y="2084832"/>
-            <a:ext cx="54864" cy="54864"/>
-          </a:xfrm>
-          <a:prstGeom prst="ellipse">
-            <a:avLst/>
-          </a:prstGeom>
-          <a:solidFill>
-            <a:srgbClr val="FF5F56"/>
-          </a:solidFill>
-          <a:ln>
-            <a:noFill/>
-          </a:ln>
-        </p:spPr>
-        <p:style>
-          <a:lnRef idx="1">
-            <a:schemeClr val="accent1"/>
-          </a:lnRef>
-          <a:fillRef idx="3">
-            <a:schemeClr val="accent1"/>
-          </a:fillRef>
-          <a:effectRef idx="2">
-            <a:schemeClr val="accent1"/>
-          </a:effectRef>
-          <a:fontRef idx="minor">
-            <a:schemeClr val="lt1"/>
-          </a:fontRef>
-        </p:style>
-        <p:txBody>
-          <a:bodyPr rtlCol="0" anchor="ctr"/>
-          <a:lstStyle/>
-          <a:p>
-            <a:pPr algn="ctr"/>
-          </a:p>
-        </p:txBody>
-      </p:sp>
-      <p:sp>
-        <p:nvSpPr>
-          <p:cNvPr id="14" name="Oval 13"/>
-          <p:cNvSpPr/>
-          <p:nvPr/>
-        </p:nvSpPr>
-        <p:spPr>
-          <a:xfrm>
-            <a:off x="7607808" y="2084832"/>
-            <a:ext cx="54864" cy="54864"/>
-          </a:xfrm>
-          <a:prstGeom prst="ellipse">
-            <a:avLst/>
-          </a:prstGeom>
-          <a:solidFill>
-            <a:srgbClr val="FFBD2E"/>
-          </a:solidFill>
-          <a:ln>
-            <a:noFill/>
-          </a:ln>
-        </p:spPr>
-        <p:style>
-          <a:lnRef idx="1">
-            <a:schemeClr val="accent1"/>
-          </a:lnRef>
-          <a:fillRef idx="3">
-            <a:schemeClr val="accent1"/>
-          </a:fillRef>
-          <a:effectRef idx="2">
-            <a:schemeClr val="accent1"/>
-          </a:effectRef>
-          <a:fontRef idx="minor">
-            <a:schemeClr val="lt1"/>
-          </a:fontRef>
-        </p:style>
-        <p:txBody>
-          <a:bodyPr rtlCol="0" anchor="ctr"/>
-          <a:lstStyle/>
-          <a:p>
-            <a:pPr algn="ctr"/>
-          </a:p>
-        </p:txBody>
-      </p:sp>
-      <p:sp>
-        <p:nvSpPr>
-          <p:cNvPr id="15" name="Oval 14"/>
-          <p:cNvSpPr/>
-          <p:nvPr/>
-        </p:nvSpPr>
-        <p:spPr>
-          <a:xfrm>
-            <a:off x="7699248" y="2084832"/>
-            <a:ext cx="54864" cy="54864"/>
-          </a:xfrm>
-          <a:prstGeom prst="ellipse">
-            <a:avLst/>
-          </a:prstGeom>
-          <a:solidFill>
-            <a:srgbClr val="27C93F"/>
-          </a:solidFill>
-          <a:ln>
-            <a:noFill/>
-          </a:ln>
-        </p:spPr>
-        <p:style>
-          <a:lnRef idx="1">
-            <a:schemeClr val="accent1"/>
-          </a:lnRef>
-          <a:fillRef idx="3">
-            <a:schemeClr val="accent1"/>
-          </a:fillRef>
-          <a:effectRef idx="2">
-            <a:schemeClr val="accent1"/>
-          </a:effectRef>
-          <a:fontRef idx="minor">
-            <a:schemeClr val="lt1"/>
-          </a:fontRef>
-        </p:style>
-        <p:txBody>
-          <a:bodyPr rtlCol="0" anchor="ctr"/>
-          <a:lstStyle/>
-          <a:p>
-            <a:pPr algn="ctr"/>
-          </a:p>
-        </p:txBody>
-      </p:sp>
     </p:spTree>
   </p:cSld>
   <p:clrMapOvr>
@@ -4569,7 +5099,7 @@
 </file>
 
 <file path=ppt/slides/slide4.xml><?xml version="1.0" encoding="utf-8"?>
-<p:sld xmlns:a="http://schemas.openxmlformats.org/drawingml/2006/main" xmlns:p="http://schemas.openxmlformats.org/presentationml/2006/main" xmlns:r="http://schemas.openxmlformats.org/officeDocument/2006/relationships">
+<p:sld xmlns:a="http://schemas.openxmlformats.org/drawingml/2006/main" xmlns:r="http://schemas.openxmlformats.org/officeDocument/2006/relationships" xmlns:p="http://schemas.openxmlformats.org/presentationml/2006/main">
   <p:cSld>
     <p:bg>
       <p:bgPr>
@@ -4585,7 +5115,14 @@
         <p:cNvGrpSpPr/>
         <p:nvPr/>
       </p:nvGrpSpPr>
-      <p:grpSpPr/>
+      <p:grpSpPr>
+        <a:xfrm>
+          <a:off x="0" y="0"/>
+          <a:ext cx="0" cy="0"/>
+          <a:chOff x="0" y="0"/>
+          <a:chExt cx="0" cy="0"/>
+        </a:xfrm>
+      </p:grpSpPr>
       <p:sp>
         <p:nvSpPr>
           <p:cNvPr id="2" name="TextBox 1"/>
@@ -4653,8 +5190,30 @@
               </a:defRPr>
             </a:pPr>
             <a:r>
-              <a:t>3. Agent Workflow 기획 및 구성</a:t>
-            </a:r>
+              <a:rPr dirty="0"/>
+              <a:t>3. Agent Workflow </a:t>
+            </a:r>
+            <a:r>
+              <a:rPr dirty="0" err="1"/>
+              <a:t>기획</a:t>
+            </a:r>
+            <a:r>
+              <a:rPr dirty="0"/>
+              <a:t> </a:t>
+            </a:r>
+            <a:r>
+              <a:rPr dirty="0" err="1"/>
+              <a:t>및</a:t>
+            </a:r>
+            <a:r>
+              <a:rPr dirty="0"/>
+              <a:t> </a:t>
+            </a:r>
+            <a:r>
+              <a:rPr dirty="0" err="1"/>
+              <a:t>구성</a:t>
+            </a:r>
+            <a:endParaRPr dirty="0"/>
           </a:p>
         </p:txBody>
       </p:sp>
@@ -4736,6 +5295,7 @@
           <a:lstStyle/>
           <a:p>
             <a:pPr algn="ctr"/>
+            <a:endParaRPr/>
           </a:p>
         </p:txBody>
       </p:sp>
@@ -4836,6 +5396,7 @@
           <a:lstStyle/>
           <a:p>
             <a:pPr algn="ctr"/>
+            <a:endParaRPr/>
           </a:p>
         </p:txBody>
       </p:sp>
@@ -4932,7 +5493,7 @@
           </a:fontRef>
         </p:style>
         <p:txBody>
-          <a:bodyPr rtlCol="0" anchor="ctr" wrap="square"/>
+          <a:bodyPr wrap="square" rtlCol="0" anchor="ctr"/>
           <a:lstStyle/>
           <a:p>
             <a:pPr algn="ctr">
@@ -5023,7 +5584,7 @@
           </a:fontRef>
         </p:style>
         <p:txBody>
-          <a:bodyPr rtlCol="0" anchor="ctr" wrap="square"/>
+          <a:bodyPr wrap="square" rtlCol="0" anchor="ctr"/>
           <a:lstStyle/>
           <a:p>
             <a:pPr algn="ctr">
@@ -5114,7 +5675,7 @@
           </a:fontRef>
         </p:style>
         <p:txBody>
-          <a:bodyPr rtlCol="0" anchor="ctr" wrap="square"/>
+          <a:bodyPr wrap="square" rtlCol="0" anchor="ctr"/>
           <a:lstStyle/>
           <a:p>
             <a:pPr algn="ctr">
@@ -5205,7 +5766,7 @@
           </a:fontRef>
         </p:style>
         <p:txBody>
-          <a:bodyPr rtlCol="0" anchor="ctr" wrap="square"/>
+          <a:bodyPr wrap="square" rtlCol="0" anchor="ctr"/>
           <a:lstStyle/>
           <a:p>
             <a:pPr algn="ctr">
@@ -5253,7 +5814,24 @@
               </a:defRPr>
             </a:pPr>
             <a:r>
-              <a:t>↙ [유출 감지]</a:t>
+              <a:rPr dirty="0"/>
+              <a:t>↙ [</a:t>
+            </a:r>
+            <a:r>
+              <a:rPr dirty="0" err="1"/>
+              <a:t>유출</a:t>
+            </a:r>
+            <a:r>
+              <a:rPr dirty="0"/>
+              <a:t> </a:t>
+            </a:r>
+            <a:r>
+              <a:rPr dirty="0" err="1"/>
+              <a:t>감지</a:t>
+            </a:r>
+            <a:r>
+              <a:rPr dirty="0"/>
+              <a:t>]</a:t>
             </a:r>
           </a:p>
         </p:txBody>
@@ -5332,7 +5910,7 @@
           </a:fontRef>
         </p:style>
         <p:txBody>
-          <a:bodyPr rtlCol="0" anchor="ctr" wrap="square"/>
+          <a:bodyPr wrap="square" rtlCol="0" anchor="ctr"/>
           <a:lstStyle/>
           <a:p>
             <a:pPr algn="ctr">
@@ -5387,7 +5965,7 @@
           </a:fontRef>
         </p:style>
         <p:txBody>
-          <a:bodyPr rtlCol="0" anchor="ctr" wrap="square"/>
+          <a:bodyPr wrap="square" rtlCol="0" anchor="ctr"/>
           <a:lstStyle/>
           <a:p>
             <a:pPr algn="ctr">
@@ -5478,7 +6056,7 @@
           </a:fontRef>
         </p:style>
         <p:txBody>
-          <a:bodyPr rtlCol="0" anchor="ctr" wrap="square"/>
+          <a:bodyPr wrap="square" rtlCol="0" anchor="ctr"/>
           <a:lstStyle/>
           <a:p>
             <a:pPr algn="ctr">
@@ -5504,7 +6082,7 @@
 </file>
 
 <file path=ppt/slides/slide5.xml><?xml version="1.0" encoding="utf-8"?>
-<p:sld xmlns:a="http://schemas.openxmlformats.org/drawingml/2006/main" xmlns:p="http://schemas.openxmlformats.org/presentationml/2006/main" xmlns:r="http://schemas.openxmlformats.org/officeDocument/2006/relationships">
+<p:sld xmlns:a="http://schemas.openxmlformats.org/drawingml/2006/main" xmlns:r="http://schemas.openxmlformats.org/officeDocument/2006/relationships" xmlns:p="http://schemas.openxmlformats.org/presentationml/2006/main">
   <p:cSld>
     <p:bg>
       <p:bgPr>
@@ -5520,7 +6098,14 @@
         <p:cNvGrpSpPr/>
         <p:nvPr/>
       </p:nvGrpSpPr>
-      <p:grpSpPr/>
+      <p:grpSpPr>
+        <a:xfrm>
+          <a:off x="0" y="0"/>
+          <a:ext cx="0" cy="0"/>
+          <a:chOff x="0" y="0"/>
+          <a:chExt cx="0" cy="0"/>
+        </a:xfrm>
+      </p:grpSpPr>
       <p:sp>
         <p:nvSpPr>
           <p:cNvPr id="2" name="TextBox 1"/>
@@ -5671,6 +6256,7 @@
           <a:lstStyle/>
           <a:p>
             <a:pPr algn="ctr"/>
+            <a:endParaRPr/>
           </a:p>
         </p:txBody>
       </p:sp>
@@ -5708,8 +6294,34 @@
               </a:defRPr>
             </a:pPr>
             <a:r>
-              <a:t>자율적인 상호 소통 구조</a:t>
-            </a:r>
+              <a:rPr dirty="0" err="1"/>
+              <a:t>자율적인</a:t>
+            </a:r>
+            <a:r>
+              <a:rPr dirty="0"/>
+              <a:t> </a:t>
+            </a:r>
+            <a:r>
+              <a:rPr dirty="0" err="1"/>
+              <a:t>상호</a:t>
+            </a:r>
+            <a:r>
+              <a:rPr dirty="0"/>
+              <a:t> </a:t>
+            </a:r>
+            <a:r>
+              <a:rPr dirty="0" err="1"/>
+              <a:t>소통</a:t>
+            </a:r>
+            <a:r>
+              <a:rPr dirty="0"/>
+              <a:t> </a:t>
+            </a:r>
+            <a:r>
+              <a:rPr dirty="0" err="1"/>
+              <a:t>구조</a:t>
+            </a:r>
+            <a:endParaRPr dirty="0"/>
           </a:p>
           <a:p>
             <a:pPr>
@@ -5724,20 +6336,344 @@
               </a:defRPr>
             </a:pPr>
             <a:r>
-              <a:t>• 에이전트 간 소통</a:t>
-            </a:r>
-            <a:br/>
-            <a:r>
-              <a:t>  플레이어의 개입 없이도 에이전트들끼리 정보를 교환하고 서로 대화하여 상황과 추리가 실시간으로 역동적으로 변화하는 한층 더 복잡한 게임 환경을 구축합니다.</a:t>
-            </a:r>
-            <a:br/>
-            <a:br/>
-            <a:r>
-              <a:t>• 실시간 정보 전이</a:t>
-            </a:r>
-            <a:br/>
-            <a:r>
-              <a:t>  한 에이전트의 비밀이 누설되면 다른 에이전트가 그 정보를 인지해 대화 내용에 실시간 반영되는 시스템을 구현합니다.</a:t>
+              <a:rPr dirty="0"/>
+              <a:t>• </a:t>
+            </a:r>
+            <a:r>
+              <a:rPr dirty="0" err="1"/>
+              <a:t>에이전트</a:t>
+            </a:r>
+            <a:r>
+              <a:rPr dirty="0"/>
+              <a:t> </a:t>
+            </a:r>
+            <a:r>
+              <a:rPr dirty="0" err="1"/>
+              <a:t>간</a:t>
+            </a:r>
+            <a:r>
+              <a:rPr dirty="0"/>
+              <a:t> </a:t>
+            </a:r>
+            <a:r>
+              <a:rPr dirty="0" err="1"/>
+              <a:t>소통</a:t>
+            </a:r>
+            <a:br>
+              <a:rPr dirty="0"/>
+            </a:br>
+            <a:r>
+              <a:rPr dirty="0"/>
+              <a:t>  </a:t>
+            </a:r>
+            <a:r>
+              <a:rPr dirty="0" err="1"/>
+              <a:t>플레이어의</a:t>
+            </a:r>
+            <a:r>
+              <a:rPr dirty="0"/>
+              <a:t> </a:t>
+            </a:r>
+            <a:r>
+              <a:rPr dirty="0" err="1"/>
+              <a:t>개입</a:t>
+            </a:r>
+            <a:r>
+              <a:rPr dirty="0"/>
+              <a:t> </a:t>
+            </a:r>
+            <a:r>
+              <a:rPr dirty="0" err="1"/>
+              <a:t>없이도</a:t>
+            </a:r>
+            <a:r>
+              <a:rPr dirty="0"/>
+              <a:t> </a:t>
+            </a:r>
+            <a:r>
+              <a:rPr dirty="0" err="1"/>
+              <a:t>에이전트들끼리</a:t>
+            </a:r>
+            <a:r>
+              <a:rPr dirty="0"/>
+              <a:t> </a:t>
+            </a:r>
+            <a:r>
+              <a:rPr dirty="0" err="1"/>
+              <a:t>정보를</a:t>
+            </a:r>
+            <a:r>
+              <a:rPr dirty="0"/>
+              <a:t> </a:t>
+            </a:r>
+            <a:r>
+              <a:rPr dirty="0" err="1"/>
+              <a:t>교환하고</a:t>
+            </a:r>
+            <a:r>
+              <a:rPr dirty="0"/>
+              <a:t> </a:t>
+            </a:r>
+            <a:r>
+              <a:rPr dirty="0" err="1"/>
+              <a:t>서로</a:t>
+            </a:r>
+            <a:r>
+              <a:rPr dirty="0"/>
+              <a:t> </a:t>
+            </a:r>
+            <a:r>
+              <a:rPr dirty="0" err="1"/>
+              <a:t>대화하여</a:t>
+            </a:r>
+            <a:r>
+              <a:rPr dirty="0"/>
+              <a:t> </a:t>
+            </a:r>
+            <a:r>
+              <a:rPr dirty="0" err="1"/>
+              <a:t>상황과</a:t>
+            </a:r>
+            <a:r>
+              <a:rPr dirty="0"/>
+              <a:t> </a:t>
+            </a:r>
+            <a:r>
+              <a:rPr dirty="0" err="1"/>
+              <a:t>추리가</a:t>
+            </a:r>
+            <a:r>
+              <a:rPr dirty="0"/>
+              <a:t> </a:t>
+            </a:r>
+            <a:r>
+              <a:rPr dirty="0" err="1"/>
+              <a:t>실시간으로</a:t>
+            </a:r>
+            <a:r>
+              <a:rPr dirty="0"/>
+              <a:t> </a:t>
+            </a:r>
+            <a:r>
+              <a:rPr dirty="0" err="1"/>
+              <a:t>역동적으로</a:t>
+            </a:r>
+            <a:r>
+              <a:rPr dirty="0"/>
+              <a:t> </a:t>
+            </a:r>
+            <a:r>
+              <a:rPr dirty="0" err="1"/>
+              <a:t>변화하는</a:t>
+            </a:r>
+            <a:r>
+              <a:rPr dirty="0"/>
+              <a:t> </a:t>
+            </a:r>
+            <a:r>
+              <a:rPr dirty="0" err="1"/>
+              <a:t>한층</a:t>
+            </a:r>
+            <a:r>
+              <a:rPr dirty="0"/>
+              <a:t> </a:t>
+            </a:r>
+            <a:r>
+              <a:rPr dirty="0" err="1"/>
+              <a:t>더</a:t>
+            </a:r>
+            <a:r>
+              <a:rPr dirty="0"/>
+              <a:t> </a:t>
+            </a:r>
+            <a:r>
+              <a:rPr dirty="0" err="1"/>
+              <a:t>복잡한</a:t>
+            </a:r>
+            <a:r>
+              <a:rPr dirty="0"/>
+              <a:t> </a:t>
+            </a:r>
+            <a:r>
+              <a:rPr dirty="0" err="1"/>
+              <a:t>게임</a:t>
+            </a:r>
+            <a:r>
+              <a:rPr dirty="0"/>
+              <a:t> </a:t>
+            </a:r>
+            <a:r>
+              <a:rPr dirty="0" err="1"/>
+              <a:t>환경을</a:t>
+            </a:r>
+            <a:r>
+              <a:rPr dirty="0"/>
+              <a:t> </a:t>
+            </a:r>
+            <a:r>
+              <a:rPr dirty="0" err="1"/>
+              <a:t>구축합니다</a:t>
+            </a:r>
+            <a:r>
+              <a:rPr dirty="0"/>
+              <a:t>.</a:t>
+            </a:r>
+            <a:br>
+              <a:rPr dirty="0"/>
+            </a:br>
+            <a:br>
+              <a:rPr dirty="0"/>
+            </a:br>
+            <a:r>
+              <a:rPr dirty="0"/>
+              <a:t>• </a:t>
+            </a:r>
+            <a:r>
+              <a:rPr dirty="0" err="1"/>
+              <a:t>실시간</a:t>
+            </a:r>
+            <a:r>
+              <a:rPr dirty="0"/>
+              <a:t> </a:t>
+            </a:r>
+            <a:r>
+              <a:rPr dirty="0" err="1"/>
+              <a:t>정보</a:t>
+            </a:r>
+            <a:r>
+              <a:rPr dirty="0"/>
+              <a:t> </a:t>
+            </a:r>
+            <a:r>
+              <a:rPr dirty="0" err="1"/>
+              <a:t>전이</a:t>
+            </a:r>
+            <a:br>
+              <a:rPr dirty="0"/>
+            </a:br>
+            <a:r>
+              <a:rPr dirty="0"/>
+              <a:t>  </a:t>
+            </a:r>
+            <a:r>
+              <a:rPr dirty="0" err="1"/>
+              <a:t>한</a:t>
+            </a:r>
+            <a:r>
+              <a:rPr dirty="0"/>
+              <a:t> </a:t>
+            </a:r>
+            <a:r>
+              <a:rPr dirty="0" err="1"/>
+              <a:t>에이전트의</a:t>
+            </a:r>
+            <a:r>
+              <a:rPr dirty="0"/>
+              <a:t> </a:t>
+            </a:r>
+            <a:r>
+              <a:rPr dirty="0" err="1"/>
+              <a:t>비밀이</a:t>
+            </a:r>
+            <a:r>
+              <a:rPr dirty="0"/>
+              <a:t> </a:t>
+            </a:r>
+            <a:r>
+              <a:rPr dirty="0" err="1"/>
+              <a:t>누설되면</a:t>
+            </a:r>
+            <a:r>
+              <a:rPr dirty="0"/>
+              <a:t> </a:t>
+            </a:r>
+            <a:r>
+              <a:rPr dirty="0" err="1"/>
+              <a:t>다른</a:t>
+            </a:r>
+            <a:r>
+              <a:rPr dirty="0"/>
+              <a:t> </a:t>
+            </a:r>
+            <a:r>
+              <a:rPr dirty="0" err="1"/>
+              <a:t>에이전트가</a:t>
+            </a:r>
+            <a:r>
+              <a:rPr dirty="0"/>
+              <a:t> </a:t>
+            </a:r>
+            <a:r>
+              <a:rPr dirty="0" err="1"/>
+              <a:t>그</a:t>
+            </a:r>
+            <a:r>
+              <a:rPr dirty="0"/>
+              <a:t> </a:t>
+            </a:r>
+            <a:r>
+              <a:rPr dirty="0" err="1"/>
+              <a:t>정보를</a:t>
+            </a:r>
+            <a:r>
+              <a:rPr dirty="0"/>
+              <a:t> </a:t>
+            </a:r>
+            <a:r>
+              <a:rPr dirty="0" err="1"/>
+              <a:t>인지해</a:t>
+            </a:r>
+            <a:r>
+              <a:rPr dirty="0"/>
+              <a:t> </a:t>
+            </a:r>
+            <a:r>
+              <a:rPr dirty="0" err="1"/>
+              <a:t>대화</a:t>
+            </a:r>
+            <a:r>
+              <a:rPr dirty="0"/>
+              <a:t> </a:t>
+            </a:r>
+            <a:r>
+              <a:rPr dirty="0" err="1"/>
+              <a:t>내용에</a:t>
+            </a:r>
+            <a:r>
+              <a:rPr dirty="0"/>
+              <a:t> </a:t>
+            </a:r>
+            <a:r>
+              <a:rPr dirty="0" err="1"/>
+              <a:t>실시간</a:t>
+            </a:r>
+            <a:r>
+              <a:rPr dirty="0"/>
+              <a:t> </a:t>
+            </a:r>
+            <a:r>
+              <a:rPr dirty="0" err="1"/>
+              <a:t>반영되는</a:t>
+            </a:r>
+            <a:r>
+              <a:rPr dirty="0"/>
+              <a:t> </a:t>
+            </a:r>
+            <a:r>
+              <a:rPr dirty="0" err="1"/>
+              <a:t>시스템을</a:t>
+            </a:r>
+            <a:r>
+              <a:rPr dirty="0"/>
+              <a:t> </a:t>
+            </a:r>
+            <a:r>
+              <a:rPr dirty="0" err="1"/>
+              <a:t>구현합니다</a:t>
+            </a:r>
+            <a:r>
+              <a:rPr dirty="0"/>
+              <a:t>.</a:t>
             </a:r>
           </a:p>
         </p:txBody>
@@ -5784,6 +6720,7 @@
           <a:lstStyle/>
           <a:p>
             <a:pPr algn="ctr"/>
+            <a:endParaRPr/>
           </a:p>
         </p:txBody>
       </p:sp>
@@ -5852,51 +6789,6 @@
             <a:r>
               <a:t>  사건의 전말, 단서 배치, 용의자 정보 권한 및 상반된 알리바이까지 자동으로 완벽하게 빌드 및 배포되는 게임 시나리오 파이프라인을 기획 및 설계합니다.</a:t>
             </a:r>
-          </a:p>
-        </p:txBody>
-      </p:sp>
-      <p:sp>
-        <p:nvSpPr>
-          <p:cNvPr id="9" name="Rounded Rectangle 8"/>
-          <p:cNvSpPr/>
-          <p:nvPr/>
-        </p:nvSpPr>
-        <p:spPr>
-          <a:xfrm>
-            <a:off x="7406640" y="2011680"/>
-            <a:ext cx="3840480" cy="2601468"/>
-          </a:xfrm>
-          <a:prstGeom prst="roundRect">
-            <a:avLst/>
-          </a:prstGeom>
-          <a:solidFill>
-            <a:srgbClr val="08090B"/>
-          </a:solidFill>
-          <a:ln w="12700">
-            <a:solidFill>
-              <a:srgbClr val="252832"/>
-            </a:solidFill>
-          </a:ln>
-        </p:spPr>
-        <p:style>
-          <a:lnRef idx="1">
-            <a:schemeClr val="accent1"/>
-          </a:lnRef>
-          <a:fillRef idx="3">
-            <a:schemeClr val="accent1"/>
-          </a:fillRef>
-          <a:effectRef idx="2">
-            <a:schemeClr val="accent1"/>
-          </a:effectRef>
-          <a:fontRef idx="minor">
-            <a:schemeClr val="lt1"/>
-          </a:fontRef>
-        </p:style>
-        <p:txBody>
-          <a:bodyPr rtlCol="0" anchor="ctr"/>
-          <a:lstStyle/>
-          <a:p>
-            <a:pPr algn="ctr"/>
           </a:p>
         </p:txBody>
       </p:sp>
@@ -5910,149 +6802,21 @@
         </p:nvPicPr>
         <p:blipFill>
           <a:blip r:embed="rId2"/>
+          <a:srcRect l="34851" r="35184"/>
           <a:stretch>
             <a:fillRect/>
           </a:stretch>
         </p:blipFill>
         <p:spPr>
           <a:xfrm>
-            <a:off x="7415784" y="2212848"/>
-            <a:ext cx="3822192" cy="2391156"/>
+            <a:off x="7716129" y="752425"/>
+            <a:ext cx="2708031" cy="5648375"/>
           </a:xfrm>
           <a:prstGeom prst="rect">
             <a:avLst/>
           </a:prstGeom>
         </p:spPr>
       </p:pic>
-      <p:sp>
-        <p:nvSpPr>
-          <p:cNvPr id="11" name="Oval 10"/>
-          <p:cNvSpPr/>
-          <p:nvPr/>
-        </p:nvSpPr>
-        <p:spPr>
-          <a:xfrm>
-            <a:off x="7516368" y="2084832"/>
-            <a:ext cx="54864" cy="54864"/>
-          </a:xfrm>
-          <a:prstGeom prst="ellipse">
-            <a:avLst/>
-          </a:prstGeom>
-          <a:solidFill>
-            <a:srgbClr val="FF5F56"/>
-          </a:solidFill>
-          <a:ln>
-            <a:noFill/>
-          </a:ln>
-        </p:spPr>
-        <p:style>
-          <a:lnRef idx="1">
-            <a:schemeClr val="accent1"/>
-          </a:lnRef>
-          <a:fillRef idx="3">
-            <a:schemeClr val="accent1"/>
-          </a:fillRef>
-          <a:effectRef idx="2">
-            <a:schemeClr val="accent1"/>
-          </a:effectRef>
-          <a:fontRef idx="minor">
-            <a:schemeClr val="lt1"/>
-          </a:fontRef>
-        </p:style>
-        <p:txBody>
-          <a:bodyPr rtlCol="0" anchor="ctr"/>
-          <a:lstStyle/>
-          <a:p>
-            <a:pPr algn="ctr"/>
-          </a:p>
-        </p:txBody>
-      </p:sp>
-      <p:sp>
-        <p:nvSpPr>
-          <p:cNvPr id="12" name="Oval 11"/>
-          <p:cNvSpPr/>
-          <p:nvPr/>
-        </p:nvSpPr>
-        <p:spPr>
-          <a:xfrm>
-            <a:off x="7607808" y="2084832"/>
-            <a:ext cx="54864" cy="54864"/>
-          </a:xfrm>
-          <a:prstGeom prst="ellipse">
-            <a:avLst/>
-          </a:prstGeom>
-          <a:solidFill>
-            <a:srgbClr val="FFBD2E"/>
-          </a:solidFill>
-          <a:ln>
-            <a:noFill/>
-          </a:ln>
-        </p:spPr>
-        <p:style>
-          <a:lnRef idx="1">
-            <a:schemeClr val="accent1"/>
-          </a:lnRef>
-          <a:fillRef idx="3">
-            <a:schemeClr val="accent1"/>
-          </a:fillRef>
-          <a:effectRef idx="2">
-            <a:schemeClr val="accent1"/>
-          </a:effectRef>
-          <a:fontRef idx="minor">
-            <a:schemeClr val="lt1"/>
-          </a:fontRef>
-        </p:style>
-        <p:txBody>
-          <a:bodyPr rtlCol="0" anchor="ctr"/>
-          <a:lstStyle/>
-          <a:p>
-            <a:pPr algn="ctr"/>
-          </a:p>
-        </p:txBody>
-      </p:sp>
-      <p:sp>
-        <p:nvSpPr>
-          <p:cNvPr id="13" name="Oval 12"/>
-          <p:cNvSpPr/>
-          <p:nvPr/>
-        </p:nvSpPr>
-        <p:spPr>
-          <a:xfrm>
-            <a:off x="7699248" y="2084832"/>
-            <a:ext cx="54864" cy="54864"/>
-          </a:xfrm>
-          <a:prstGeom prst="ellipse">
-            <a:avLst/>
-          </a:prstGeom>
-          <a:solidFill>
-            <a:srgbClr val="27C93F"/>
-          </a:solidFill>
-          <a:ln>
-            <a:noFill/>
-          </a:ln>
-        </p:spPr>
-        <p:style>
-          <a:lnRef idx="1">
-            <a:schemeClr val="accent1"/>
-          </a:lnRef>
-          <a:fillRef idx="3">
-            <a:schemeClr val="accent1"/>
-          </a:fillRef>
-          <a:effectRef idx="2">
-            <a:schemeClr val="accent1"/>
-          </a:effectRef>
-          <a:fontRef idx="minor">
-            <a:schemeClr val="lt1"/>
-          </a:fontRef>
-        </p:style>
-        <p:txBody>
-          <a:bodyPr rtlCol="0" anchor="ctr"/>
-          <a:lstStyle/>
-          <a:p>
-            <a:pPr algn="ctr"/>
-          </a:p>
-        </p:txBody>
-      </p:sp>
     </p:spTree>
   </p:cSld>
   <p:clrMapOvr>
@@ -6062,7 +6826,7 @@
 </file>
 
 <file path=ppt/slides/slide6.xml><?xml version="1.0" encoding="utf-8"?>
-<p:sld xmlns:a="http://schemas.openxmlformats.org/drawingml/2006/main" xmlns:p="http://schemas.openxmlformats.org/presentationml/2006/main" xmlns:r="http://schemas.openxmlformats.org/officeDocument/2006/relationships">
+<p:sld xmlns:a="http://schemas.openxmlformats.org/drawingml/2006/main" xmlns:r="http://schemas.openxmlformats.org/officeDocument/2006/relationships" xmlns:p="http://schemas.openxmlformats.org/presentationml/2006/main">
   <p:cSld>
     <p:bg>
       <p:bgPr>
@@ -6078,7 +6842,14 @@
         <p:cNvGrpSpPr/>
         <p:nvPr/>
       </p:nvGrpSpPr>
-      <p:grpSpPr/>
+      <p:grpSpPr>
+        <a:xfrm>
+          <a:off x="0" y="0"/>
+          <a:ext cx="0" cy="0"/>
+          <a:chOff x="0" y="0"/>
+          <a:chExt cx="0" cy="0"/>
+        </a:xfrm>
+      </p:grpSpPr>
       <p:sp>
         <p:nvSpPr>
           <p:cNvPr id="2" name="TextBox 1"/>
@@ -6229,6 +7000,7 @@
           <a:lstStyle/>
           <a:p>
             <a:pPr algn="ctr"/>
+            <a:endParaRPr/>
           </a:p>
         </p:txBody>
       </p:sp>
@@ -6329,6 +7101,7 @@
           <a:lstStyle/>
           <a:p>
             <a:pPr algn="ctr"/>
+            <a:endParaRPr/>
           </a:p>
         </p:txBody>
       </p:sp>
@@ -6429,6 +7202,7 @@
           <a:lstStyle/>
           <a:p>
             <a:pPr algn="ctr"/>
+            <a:endParaRPr/>
           </a:p>
         </p:txBody>
       </p:sp>
@@ -6529,6 +7303,7 @@
           <a:lstStyle/>
           <a:p>
             <a:pPr algn="ctr"/>
+            <a:endParaRPr/>
           </a:p>
         </p:txBody>
       </p:sp>
@@ -6541,7 +7316,7 @@
           <p:nvPr/>
         </p:nvPicPr>
         <p:blipFill>
-          <a:blip r:embed="rId2"/>
+          <a:blip r:embed="rId4"/>
           <a:stretch>
             <a:fillRect/>
           </a:stretch>
@@ -6620,10 +7395,10 @@
             <a:picLocks noChangeAspect="1"/>
           </p:cNvPicPr>
           <p:nvPr>
-            <a:videoFile r:link="rId4"/>
+            <a:videoFile r:link="rId2"/>
             <p:extLst>
               <p:ext uri="{DAA4B4D4-6D71-4841-9C94-3DE7FCFB9230}">
-                <p14:media xmlns:p14="http://schemas.microsoft.com/office/powerpoint/2010/main" r:embed="rId3"/>
+                <p14:media xmlns:p14="http://schemas.microsoft.com/office/powerpoint/2010/main" r:embed="rId1"/>
               </p:ext>
             </p:extLst>
           </p:nvPr>
@@ -6636,93 +7411,14 @@
         </p:blipFill>
         <p:spPr>
           <a:xfrm>
-            <a:off x="6949440" y="1920240"/>
-            <a:ext cx="4206240" cy="2377440"/>
+            <a:off x="6792761" y="253218"/>
+            <a:ext cx="3696638" cy="6330462"/>
           </a:xfrm>
           <a:prstGeom prst="rect">
             <a:avLst/>
           </a:prstGeom>
         </p:spPr>
       </p:pic>
-      <p:sp>
-        <p:nvSpPr>
-          <p:cNvPr id="15" name="Rectangle 14"/>
-          <p:cNvSpPr/>
-          <p:nvPr/>
-        </p:nvSpPr>
-        <p:spPr>
-          <a:xfrm>
-            <a:off x="6949440" y="1920240"/>
-            <a:ext cx="4206240" cy="2377440"/>
-          </a:xfrm>
-          <a:prstGeom prst="rect">
-            <a:avLst/>
-          </a:prstGeom>
-          <a:noFill/>
-          <a:ln w="19050">
-            <a:solidFill>
-              <a:srgbClr val="252832"/>
-            </a:solidFill>
-          </a:ln>
-        </p:spPr>
-        <p:style>
-          <a:lnRef idx="1">
-            <a:schemeClr val="accent1"/>
-          </a:lnRef>
-          <a:fillRef idx="3">
-            <a:schemeClr val="accent1"/>
-          </a:fillRef>
-          <a:effectRef idx="2">
-            <a:schemeClr val="accent1"/>
-          </a:effectRef>
-          <a:fontRef idx="minor">
-            <a:schemeClr val="lt1"/>
-          </a:fontRef>
-        </p:style>
-        <p:txBody>
-          <a:bodyPr rtlCol="0" anchor="ctr"/>
-          <a:lstStyle/>
-          <a:p>
-            <a:pPr algn="ctr"/>
-          </a:p>
-        </p:txBody>
-      </p:sp>
-      <p:sp>
-        <p:nvSpPr>
-          <p:cNvPr id="16" name="TextBox 15"/>
-          <p:cNvSpPr txBox="1"/>
-          <p:nvPr/>
-        </p:nvSpPr>
-        <p:spPr>
-          <a:xfrm>
-            <a:off x="6949440" y="4389120"/>
-            <a:ext cx="4206240" cy="365760"/>
-          </a:xfrm>
-          <a:prstGeom prst="rect">
-            <a:avLst/>
-          </a:prstGeom>
-          <a:noFill/>
-        </p:spPr>
-        <p:txBody>
-          <a:bodyPr wrap="square" lIns="0" tIns="0" rIns="0" bIns="0">
-            <a:spAutoFit/>
-          </a:bodyPr>
-          <a:lstStyle/>
-          <a:p>
-            <a:pPr algn="ctr">
-              <a:defRPr sz="1100" b="0">
-                <a:solidFill>
-                  <a:srgbClr val="525866"/>
-                </a:solidFill>
-                <a:latin typeface="Malgun Gothic"/>
-              </a:defRPr>
-            </a:pPr>
-            <a:r>
-              <a:t>* 데모 시연 영상 (agent-workflow-demo.mp4)</a:t>
-            </a:r>
-          </a:p>
-        </p:txBody>
-      </p:sp>
     </p:spTree>
   </p:cSld>
   <p:clrMapOvr>
